--- a/Day/Day12/ReactJS_Fundamentals.pptx
+++ b/Day/Day12/ReactJS_Fundamentals.pptx
@@ -57,80 +57,81 @@
     <p:sldId id="307" r:id="rId51"/>
     <p:sldId id="310" r:id="rId52"/>
     <p:sldId id="311" r:id="rId53"/>
-    <p:sldId id="312" r:id="rId54"/>
-    <p:sldId id="313" r:id="rId55"/>
-    <p:sldId id="314" r:id="rId56"/>
-    <p:sldId id="315" r:id="rId57"/>
-    <p:sldId id="316" r:id="rId58"/>
-    <p:sldId id="317" r:id="rId59"/>
-    <p:sldId id="318" r:id="rId60"/>
-    <p:sldId id="319" r:id="rId61"/>
-    <p:sldId id="320" r:id="rId62"/>
-    <p:sldId id="321" r:id="rId63"/>
-    <p:sldId id="322" r:id="rId64"/>
-    <p:sldId id="323" r:id="rId65"/>
-    <p:sldId id="327" r:id="rId66"/>
-    <p:sldId id="328" r:id="rId67"/>
-    <p:sldId id="330" r:id="rId68"/>
-    <p:sldId id="331" r:id="rId69"/>
-    <p:sldId id="332" r:id="rId70"/>
-    <p:sldId id="333" r:id="rId71"/>
-    <p:sldId id="263" r:id="rId72"/>
-    <p:sldId id="265" r:id="rId73"/>
-    <p:sldId id="334" r:id="rId74"/>
-    <p:sldId id="336" r:id="rId75"/>
-    <p:sldId id="338" r:id="rId76"/>
-    <p:sldId id="271" r:id="rId77"/>
-    <p:sldId id="339" r:id="rId78"/>
-    <p:sldId id="340" r:id="rId79"/>
-    <p:sldId id="341" r:id="rId80"/>
-    <p:sldId id="342" r:id="rId81"/>
-    <p:sldId id="343" r:id="rId82"/>
-    <p:sldId id="344" r:id="rId83"/>
-    <p:sldId id="345" r:id="rId84"/>
-    <p:sldId id="346" r:id="rId85"/>
-    <p:sldId id="347" r:id="rId86"/>
-    <p:sldId id="348" r:id="rId87"/>
-    <p:sldId id="349" r:id="rId88"/>
-    <p:sldId id="350" r:id="rId89"/>
-    <p:sldId id="351" r:id="rId90"/>
-    <p:sldId id="352" r:id="rId91"/>
-    <p:sldId id="353" r:id="rId92"/>
-    <p:sldId id="354" r:id="rId93"/>
-    <p:sldId id="288" r:id="rId94"/>
-    <p:sldId id="355" r:id="rId95"/>
-    <p:sldId id="356" r:id="rId96"/>
-    <p:sldId id="358" r:id="rId97"/>
-    <p:sldId id="359" r:id="rId98"/>
-    <p:sldId id="360" r:id="rId99"/>
-    <p:sldId id="361" r:id="rId100"/>
-    <p:sldId id="362" r:id="rId101"/>
-    <p:sldId id="363" r:id="rId102"/>
-    <p:sldId id="365" r:id="rId103"/>
-    <p:sldId id="367" r:id="rId104"/>
-    <p:sldId id="368" r:id="rId105"/>
-    <p:sldId id="369" r:id="rId106"/>
-    <p:sldId id="371" r:id="rId107"/>
-    <p:sldId id="372" r:id="rId108"/>
-    <p:sldId id="373" r:id="rId109"/>
-    <p:sldId id="308" r:id="rId110"/>
-    <p:sldId id="309" r:id="rId111"/>
-    <p:sldId id="374" r:id="rId112"/>
-    <p:sldId id="375" r:id="rId113"/>
-    <p:sldId id="376" r:id="rId114"/>
-    <p:sldId id="377" r:id="rId115"/>
-    <p:sldId id="378" r:id="rId116"/>
-    <p:sldId id="380" r:id="rId117"/>
-    <p:sldId id="381" r:id="rId118"/>
-    <p:sldId id="382" r:id="rId119"/>
-    <p:sldId id="384" r:id="rId120"/>
-    <p:sldId id="386" r:id="rId121"/>
-    <p:sldId id="387" r:id="rId122"/>
-    <p:sldId id="388" r:id="rId123"/>
-    <p:sldId id="393" r:id="rId124"/>
-    <p:sldId id="397" r:id="rId125"/>
-    <p:sldId id="398" r:id="rId126"/>
-    <p:sldId id="399" r:id="rId127"/>
+    <p:sldId id="400" r:id="rId54"/>
+    <p:sldId id="312" r:id="rId55"/>
+    <p:sldId id="313" r:id="rId56"/>
+    <p:sldId id="314" r:id="rId57"/>
+    <p:sldId id="315" r:id="rId58"/>
+    <p:sldId id="316" r:id="rId59"/>
+    <p:sldId id="317" r:id="rId60"/>
+    <p:sldId id="318" r:id="rId61"/>
+    <p:sldId id="319" r:id="rId62"/>
+    <p:sldId id="320" r:id="rId63"/>
+    <p:sldId id="321" r:id="rId64"/>
+    <p:sldId id="322" r:id="rId65"/>
+    <p:sldId id="323" r:id="rId66"/>
+    <p:sldId id="327" r:id="rId67"/>
+    <p:sldId id="328" r:id="rId68"/>
+    <p:sldId id="330" r:id="rId69"/>
+    <p:sldId id="331" r:id="rId70"/>
+    <p:sldId id="332" r:id="rId71"/>
+    <p:sldId id="333" r:id="rId72"/>
+    <p:sldId id="263" r:id="rId73"/>
+    <p:sldId id="265" r:id="rId74"/>
+    <p:sldId id="334" r:id="rId75"/>
+    <p:sldId id="336" r:id="rId76"/>
+    <p:sldId id="338" r:id="rId77"/>
+    <p:sldId id="271" r:id="rId78"/>
+    <p:sldId id="339" r:id="rId79"/>
+    <p:sldId id="340" r:id="rId80"/>
+    <p:sldId id="341" r:id="rId81"/>
+    <p:sldId id="342" r:id="rId82"/>
+    <p:sldId id="343" r:id="rId83"/>
+    <p:sldId id="344" r:id="rId84"/>
+    <p:sldId id="345" r:id="rId85"/>
+    <p:sldId id="346" r:id="rId86"/>
+    <p:sldId id="347" r:id="rId87"/>
+    <p:sldId id="348" r:id="rId88"/>
+    <p:sldId id="349" r:id="rId89"/>
+    <p:sldId id="350" r:id="rId90"/>
+    <p:sldId id="351" r:id="rId91"/>
+    <p:sldId id="352" r:id="rId92"/>
+    <p:sldId id="353" r:id="rId93"/>
+    <p:sldId id="354" r:id="rId94"/>
+    <p:sldId id="288" r:id="rId95"/>
+    <p:sldId id="355" r:id="rId96"/>
+    <p:sldId id="356" r:id="rId97"/>
+    <p:sldId id="358" r:id="rId98"/>
+    <p:sldId id="359" r:id="rId99"/>
+    <p:sldId id="360" r:id="rId100"/>
+    <p:sldId id="361" r:id="rId101"/>
+    <p:sldId id="362" r:id="rId102"/>
+    <p:sldId id="363" r:id="rId103"/>
+    <p:sldId id="365" r:id="rId104"/>
+    <p:sldId id="367" r:id="rId105"/>
+    <p:sldId id="368" r:id="rId106"/>
+    <p:sldId id="369" r:id="rId107"/>
+    <p:sldId id="371" r:id="rId108"/>
+    <p:sldId id="372" r:id="rId109"/>
+    <p:sldId id="373" r:id="rId110"/>
+    <p:sldId id="308" r:id="rId111"/>
+    <p:sldId id="309" r:id="rId112"/>
+    <p:sldId id="374" r:id="rId113"/>
+    <p:sldId id="375" r:id="rId114"/>
+    <p:sldId id="376" r:id="rId115"/>
+    <p:sldId id="377" r:id="rId116"/>
+    <p:sldId id="378" r:id="rId117"/>
+    <p:sldId id="380" r:id="rId118"/>
+    <p:sldId id="381" r:id="rId119"/>
+    <p:sldId id="382" r:id="rId120"/>
+    <p:sldId id="384" r:id="rId121"/>
+    <p:sldId id="386" r:id="rId122"/>
+    <p:sldId id="387" r:id="rId123"/>
+    <p:sldId id="388" r:id="rId124"/>
+    <p:sldId id="393" r:id="rId125"/>
+    <p:sldId id="397" r:id="rId126"/>
+    <p:sldId id="398" r:id="rId127"/>
+    <p:sldId id="399" r:id="rId128"/>
   </p:sldIdLst>
   <p:sldSz cx="12192000" cy="6858000"/>
   <p:notesSz cx="6858000" cy="9144000"/>
@@ -400,7 +401,7 @@
           <a:p>
             <a:fld id="{5BCAD085-E8A6-8845-BD4E-CB4CCA059FC4}" type="datetimeFigureOut">
               <a:rPr lang="en-US" smtClean="0"/>
-              <a:t>7/28/2026</a:t>
+              <a:t>7/30/2026</a:t>
             </a:fld>
             <a:endParaRPr lang="en-US"/>
           </a:p>
@@ -613,7 +614,7 @@
           <a:p>
             <a:fld id="{5BCAD085-E8A6-8845-BD4E-CB4CCA059FC4}" type="datetimeFigureOut">
               <a:rPr lang="en-US" smtClean="0"/>
-              <a:t>7/28/2026</a:t>
+              <a:t>7/30/2026</a:t>
             </a:fld>
             <a:endParaRPr lang="en-US"/>
           </a:p>
@@ -936,7 +937,7 @@
           <a:p>
             <a:fld id="{5BCAD085-E8A6-8845-BD4E-CB4CCA059FC4}" type="datetimeFigureOut">
               <a:rPr lang="en-US" smtClean="0"/>
-              <a:t>7/28/2026</a:t>
+              <a:t>7/30/2026</a:t>
             </a:fld>
             <a:endParaRPr lang="en-US"/>
           </a:p>
@@ -1215,7 +1216,7 @@
           <a:p>
             <a:fld id="{5BCAD085-E8A6-8845-BD4E-CB4CCA059FC4}" type="datetimeFigureOut">
               <a:rPr lang="en-US" smtClean="0"/>
-              <a:t>7/28/2026</a:t>
+              <a:t>7/30/2026</a:t>
             </a:fld>
             <a:endParaRPr lang="en-US"/>
           </a:p>
@@ -1489,7 +1490,7 @@
           <a:p>
             <a:fld id="{5BCAD085-E8A6-8845-BD4E-CB4CCA059FC4}" type="datetimeFigureOut">
               <a:rPr lang="en-US" smtClean="0"/>
-              <a:t>7/28/2026</a:t>
+              <a:t>7/30/2026</a:t>
             </a:fld>
             <a:endParaRPr lang="en-US"/>
           </a:p>
@@ -1916,7 +1917,7 @@
           <a:p>
             <a:fld id="{5BCAD085-E8A6-8845-BD4E-CB4CCA059FC4}" type="datetimeFigureOut">
               <a:rPr lang="en-US" smtClean="0"/>
-              <a:t>7/28/2026</a:t>
+              <a:t>7/30/2026</a:t>
             </a:fld>
             <a:endParaRPr lang="en-US"/>
           </a:p>
@@ -2029,7 +2030,7 @@
           <a:p>
             <a:fld id="{5BCAD085-E8A6-8845-BD4E-CB4CCA059FC4}" type="datetimeFigureOut">
               <a:rPr lang="en-US" smtClean="0"/>
-              <a:t>7/28/2026</a:t>
+              <a:t>7/30/2026</a:t>
             </a:fld>
             <a:endParaRPr lang="en-US"/>
           </a:p>
@@ -2348,7 +2349,7 @@
           <a:p>
             <a:fld id="{5BCAD085-E8A6-8845-BD4E-CB4CCA059FC4}" type="datetimeFigureOut">
               <a:rPr lang="en-US" smtClean="0"/>
-              <a:t>7/28/2026</a:t>
+              <a:t>7/30/2026</a:t>
             </a:fld>
             <a:endParaRPr lang="en-US"/>
           </a:p>
@@ -2647,7 +2648,7 @@
           <a:p>
             <a:fld id="{5BCAD085-E8A6-8845-BD4E-CB4CCA059FC4}" type="datetimeFigureOut">
               <a:rPr lang="en-US" smtClean="0"/>
-              <a:t>7/28/2026</a:t>
+              <a:t>7/30/2026</a:t>
             </a:fld>
             <a:endParaRPr lang="en-US"/>
           </a:p>
@@ -2855,7 +2856,7 @@
           <a:p>
             <a:fld id="{5BCAD085-E8A6-8845-BD4E-CB4CCA059FC4}" type="datetimeFigureOut">
               <a:rPr lang="en-US" smtClean="0"/>
-              <a:t>7/28/2026</a:t>
+              <a:t>7/30/2026</a:t>
             </a:fld>
             <a:endParaRPr lang="en-US"/>
           </a:p>
@@ -3133,7 +3134,7 @@
           <a:p>
             <a:fld id="{5BCAD085-E8A6-8845-BD4E-CB4CCA059FC4}" type="datetimeFigureOut">
               <a:rPr lang="en-US" smtClean="0"/>
-              <a:t>7/28/2026</a:t>
+              <a:t>7/30/2026</a:t>
             </a:fld>
             <a:endParaRPr lang="en-US"/>
           </a:p>
@@ -5327,7 +5328,23 @@
           <a:p>
             <a:r>
               <a:rPr lang="en-IN" dirty="0"/>
-              <a:t>This comparison process is often called diffing, and the overall update process is called reconciliation. </a:t>
+              <a:t>This comparison process is often called </a:t>
+            </a:r>
+            <a:r>
+              <a:rPr lang="en-IN" u="sng" dirty="0"/>
+              <a:t>diffing</a:t>
+            </a:r>
+            <a:r>
+              <a:rPr lang="en-IN" dirty="0"/>
+              <a:t>, and the overall update process is called </a:t>
+            </a:r>
+            <a:r>
+              <a:rPr lang="en-IN" u="sng" dirty="0"/>
+              <a:t>reconciliation</a:t>
+            </a:r>
+            <a:r>
+              <a:rPr lang="en-IN" dirty="0"/>
+              <a:t>. </a:t>
             </a:r>
           </a:p>
         </p:txBody>
@@ -5378,7 +5395,7 @@
           <a:lstStyle/>
           <a:p>
             <a:r>
-              <a:t>Example with input state</a:t>
+              <a:t>Simple memory trick:</a:t>
             </a:r>
           </a:p>
         </p:txBody>
@@ -5402,7 +5419,8 @@
               <a:defRPr sz="2200"/>
             </a:pPr>
             <a:r>
-              <a:t>import { useState } from "react";</a:t>
+              <a:rPr dirty="0"/>
+              <a:t>Props = passed in.</a:t>
             </a:r>
           </a:p>
           <a:p>
@@ -5410,39 +5428,8 @@
               <a:defRPr sz="2200"/>
             </a:pPr>
             <a:r>
-              <a:t>function NameForm() {</a:t>
-            </a:r>
-          </a:p>
-          <a:p>
-            <a:pPr>
-              <a:defRPr sz="2200"/>
-            </a:pPr>
-            <a:r>
-              <a:t>const [name, setName] = useState("");</a:t>
-            </a:r>
-          </a:p>
-          <a:p>
-            <a:pPr>
-              <a:defRPr sz="2200"/>
-            </a:pPr>
-            <a:r>
-              <a:t>return (</a:t>
-            </a:r>
-          </a:p>
-          <a:p>
-            <a:pPr>
-              <a:defRPr sz="2200"/>
-            </a:pPr>
-            <a:r>
-              <a:t>&lt;div&gt;</a:t>
-            </a:r>
-          </a:p>
-          <a:p>
-            <a:pPr>
-              <a:defRPr sz="2200"/>
-            </a:pPr>
-            <a:r>
-              <a:t>&lt;input</a:t>
+              <a:rPr dirty="0"/>
+              <a:t>State = managed inside.</a:t>
             </a:r>
           </a:p>
         </p:txBody>
@@ -5488,7 +5475,7 @@
           <a:lstStyle/>
           <a:p>
             <a:r>
-              <a:t>/&gt;</a:t>
+              <a:t>Example with input state</a:t>
             </a:r>
           </a:p>
         </p:txBody>
@@ -5512,7 +5499,7 @@
               <a:defRPr sz="2200"/>
             </a:pPr>
             <a:r>
-              <a:t>&lt;p&gt;Hello, {name}&lt;/p&gt;</a:t>
+              <a:t>import { useState } from "react";</a:t>
             </a:r>
           </a:p>
           <a:p>
@@ -5520,7 +5507,39 @@
               <a:defRPr sz="2200"/>
             </a:pPr>
             <a:r>
-              <a:t>&lt;/div&gt;</a:t>
+              <a:t>function NameForm() {</a:t>
+            </a:r>
+          </a:p>
+          <a:p>
+            <a:pPr>
+              <a:defRPr sz="2200"/>
+            </a:pPr>
+            <a:r>
+              <a:t>const [name, setName] = useState("");</a:t>
+            </a:r>
+          </a:p>
+          <a:p>
+            <a:pPr>
+              <a:defRPr sz="2200"/>
+            </a:pPr>
+            <a:r>
+              <a:t>return (</a:t>
+            </a:r>
+          </a:p>
+          <a:p>
+            <a:pPr>
+              <a:defRPr sz="2200"/>
+            </a:pPr>
+            <a:r>
+              <a:t>&lt;div&gt;</a:t>
+            </a:r>
+          </a:p>
+          <a:p>
+            <a:pPr>
+              <a:defRPr sz="2200"/>
+            </a:pPr>
+            <a:r>
+              <a:t>&lt;input</a:t>
             </a:r>
           </a:p>
         </p:txBody>
@@ -5566,7 +5585,7 @@
           <a:lstStyle/>
           <a:p>
             <a:r>
-              <a:t>Example with toggle state</a:t>
+              <a:t>/&gt;</a:t>
             </a:r>
           </a:p>
         </p:txBody>
@@ -5590,7 +5609,7 @@
               <a:defRPr sz="2200"/>
             </a:pPr>
             <a:r>
-              <a:t>import { useState } from "react";</a:t>
+              <a:t>&lt;p&gt;Hello, {name}&lt;/p&gt;</a:t>
             </a:r>
           </a:p>
           <a:p>
@@ -5598,39 +5617,7 @@
               <a:defRPr sz="2200"/>
             </a:pPr>
             <a:r>
-              <a:t>function ToggleText() {</a:t>
-            </a:r>
-          </a:p>
-          <a:p>
-            <a:pPr>
-              <a:defRPr sz="2200"/>
-            </a:pPr>
-            <a:r>
-              <a:t>const [show, setShow] = useState(true);</a:t>
-            </a:r>
-          </a:p>
-          <a:p>
-            <a:pPr>
-              <a:defRPr sz="2200"/>
-            </a:pPr>
-            <a:r>
-              <a:t>return (</a:t>
-            </a:r>
-          </a:p>
-          <a:p>
-            <a:pPr>
-              <a:defRPr sz="2200"/>
-            </a:pPr>
-            <a:r>
-              <a:t>&lt;div&gt;</a:t>
-            </a:r>
-          </a:p>
-          <a:p>
-            <a:pPr>
-              <a:defRPr sz="2200"/>
-            </a:pPr>
-            <a:r>
-              <a:t>&lt;button onClick={() =&gt; setShow(!show)}&gt;Toggle&lt;/button&gt;</a:t>
+              <a:t>&lt;/div&gt;</a:t>
             </a:r>
           </a:p>
         </p:txBody>
@@ -5676,7 +5663,7 @@
           <a:lstStyle/>
           <a:p>
             <a:r>
-              <a:t>Why state is important in React</a:t>
+              <a:t>Example with toggle state</a:t>
             </a:r>
           </a:p>
         </p:txBody>
@@ -5700,15 +5687,47 @@
               <a:defRPr sz="2200"/>
             </a:pPr>
             <a:r>
-              <a:t>State is one of the most important React concepts because it powers</a:t>
-            </a:r>
-            <a:br/>
-            <a:r>
-              <a:t>interactivity and dynamic rendering. Once you understand state, many React</a:t>
-            </a:r>
-            <a:br/>
-            <a:r>
-              <a:t>features become much easier to learn.</a:t>
+              <a:t>import { useState } from "react";</a:t>
+            </a:r>
+          </a:p>
+          <a:p>
+            <a:pPr>
+              <a:defRPr sz="2200"/>
+            </a:pPr>
+            <a:r>
+              <a:t>function ToggleText() {</a:t>
+            </a:r>
+          </a:p>
+          <a:p>
+            <a:pPr>
+              <a:defRPr sz="2200"/>
+            </a:pPr>
+            <a:r>
+              <a:t>const [show, setShow] = useState(true);</a:t>
+            </a:r>
+          </a:p>
+          <a:p>
+            <a:pPr>
+              <a:defRPr sz="2200"/>
+            </a:pPr>
+            <a:r>
+              <a:t>return (</a:t>
+            </a:r>
+          </a:p>
+          <a:p>
+            <a:pPr>
+              <a:defRPr sz="2200"/>
+            </a:pPr>
+            <a:r>
+              <a:t>&lt;div&gt;</a:t>
+            </a:r>
+          </a:p>
+          <a:p>
+            <a:pPr>
+              <a:defRPr sz="2200"/>
+            </a:pPr>
+            <a:r>
+              <a:t>&lt;button onClick={() =&gt; setShow(!show)}&gt;Toggle&lt;/button&gt;</a:t>
             </a:r>
           </a:p>
         </p:txBody>
@@ -5754,7 +5773,7 @@
           <a:lstStyle/>
           <a:p>
             <a:r>
-              <a:t>React Event Handling</a:t>
+              <a:t>Why state is important in React</a:t>
             </a:r>
           </a:p>
         </p:txBody>
@@ -5779,7 +5798,24 @@
             </a:pPr>
             <a:r>
               <a:rPr dirty="0"/>
-              <a:t>Event handling in React is how your components respond to user actions like</a:t>
+              <a:t>State is one of the most important React concepts because it powers</a:t>
+            </a:r>
+            <a:br>
+              <a:rPr dirty="0"/>
+            </a:br>
+            <a:r>
+              <a:rPr dirty="0"/>
+              <a:t>interactivity and dynamic rendering. </a:t>
+            </a:r>
+            <a:endParaRPr lang="en-US" dirty="0"/>
+          </a:p>
+          <a:p>
+            <a:pPr>
+              <a:defRPr sz="2200"/>
+            </a:pPr>
+            <a:r>
+              <a:rPr dirty="0"/>
+              <a:t>Once you understand state, many React</a:t>
             </a:r>
             <a:r>
               <a:rPr lang="en-US" dirty="0"/>
@@ -5787,15 +5823,7 @@
             </a:r>
             <a:r>
               <a:rPr dirty="0"/>
-              <a:t>clicks, typing, submitting forms, hovering, or pressing keys. It is one of the</a:t>
-            </a:r>
-            <a:r>
-              <a:rPr lang="en-US" dirty="0"/>
-              <a:t> </a:t>
-            </a:r>
-            <a:r>
-              <a:rPr dirty="0"/>
-              <a:t>main ways React apps become interactive.</a:t>
+              <a:t>features become much easier to learn.</a:t>
             </a:r>
           </a:p>
         </p:txBody>
@@ -5841,7 +5869,7 @@
           <a:lstStyle/>
           <a:p>
             <a:r>
-              <a:t>What it is</a:t>
+              <a:t>React Event Handling</a:t>
             </a:r>
           </a:p>
         </p:txBody>
@@ -5866,35 +5894,25 @@
             </a:pPr>
             <a:r>
               <a:rPr dirty="0"/>
-              <a:t>In React, you attach event handlers directly in JSX using camelCase names like</a:t>
+              <a:t>Event handling in React is how your components respond to user actions like</a:t>
             </a:r>
             <a:r>
               <a:rPr lang="en-US" dirty="0"/>
               <a:t> </a:t>
             </a:r>
             <a:r>
-              <a:rPr dirty="0" err="1"/>
-              <a:t>onClick</a:t>
-            </a:r>
-            <a:r>
-              <a:rPr dirty="0"/>
-              <a:t>, </a:t>
-            </a:r>
-            <a:r>
-              <a:rPr dirty="0" err="1"/>
-              <a:t>onChange</a:t>
-            </a:r>
-            <a:r>
-              <a:rPr dirty="0"/>
-              <a:t>, and </a:t>
-            </a:r>
-            <a:r>
-              <a:rPr dirty="0" err="1"/>
-              <a:t>onSubmit</a:t>
-            </a:r>
-            <a:r>
-              <a:rPr dirty="0"/>
-              <a:t>. The handler is usually a JavaScript function</a:t>
+              <a:rPr dirty="0"/>
+              <a:t>clicks, typing, submitting forms, hovering, or pressing keys. </a:t>
+            </a:r>
+            <a:endParaRPr lang="en-US" dirty="0"/>
+          </a:p>
+          <a:p>
+            <a:pPr>
+              <a:defRPr sz="2200"/>
+            </a:pPr>
+            <a:r>
+              <a:rPr dirty="0"/>
+              <a:t>It is one of the</a:t>
             </a:r>
             <a:r>
               <a:rPr lang="en-US" dirty="0"/>
@@ -5902,33 +5920,7 @@
             </a:r>
             <a:r>
               <a:rPr dirty="0"/>
-              <a:t>that runs when the event happens.</a:t>
-            </a:r>
-          </a:p>
-          <a:p>
-            <a:pPr>
-              <a:defRPr sz="2200"/>
-            </a:pPr>
-            <a:r>
-              <a:rPr dirty="0"/>
-              <a:t>function App() {</a:t>
-            </a:r>
-          </a:p>
-          <a:p>
-            <a:pPr>
-              <a:defRPr sz="2200"/>
-            </a:pPr>
-            <a:r>
-              <a:rPr dirty="0"/>
-              <a:t>function </a:t>
-            </a:r>
-            <a:r>
-              <a:rPr dirty="0" err="1"/>
-              <a:t>handleClick</a:t>
-            </a:r>
-            <a:r>
-              <a:rPr dirty="0"/>
-              <a:t>() {</a:t>
+              <a:t>main ways React apps become interactive.</a:t>
             </a:r>
           </a:p>
         </p:txBody>
@@ -5974,7 +5966,7 @@
           <a:lstStyle/>
           <a:p>
             <a:r>
-              <a:t>Why it matters</a:t>
+              <a:t>What it is</a:t>
             </a:r>
           </a:p>
         </p:txBody>
@@ -5998,7 +5990,44 @@
               <a:defRPr sz="2200"/>
             </a:pPr>
             <a:r>
-              <a:t>Event handling lets the UI react to user input in real time:</a:t>
+              <a:rPr dirty="0"/>
+              <a:t>In React, you attach event handlers directly in JSX using camelCase names like</a:t>
+            </a:r>
+            <a:r>
+              <a:rPr lang="en-US" dirty="0"/>
+              <a:t> </a:t>
+            </a:r>
+            <a:r>
+              <a:rPr dirty="0" err="1"/>
+              <a:t>onClick</a:t>
+            </a:r>
+            <a:r>
+              <a:rPr dirty="0"/>
+              <a:t>, </a:t>
+            </a:r>
+            <a:r>
+              <a:rPr dirty="0" err="1"/>
+              <a:t>onChange</a:t>
+            </a:r>
+            <a:r>
+              <a:rPr dirty="0"/>
+              <a:t>, and </a:t>
+            </a:r>
+            <a:r>
+              <a:rPr dirty="0" err="1"/>
+              <a:t>onSubmit</a:t>
+            </a:r>
+            <a:r>
+              <a:rPr dirty="0"/>
+              <a:t>. The handler is usually a JavaScript function</a:t>
+            </a:r>
+            <a:r>
+              <a:rPr lang="en-US" dirty="0"/>
+              <a:t> </a:t>
+            </a:r>
+            <a:r>
+              <a:rPr dirty="0"/>
+              <a:t>that runs when the event happens.</a:t>
             </a:r>
           </a:p>
           <a:p>
@@ -6006,7 +6035,8 @@
               <a:defRPr sz="2200"/>
             </a:pPr>
             <a:r>
-              <a:t>Clicking buttons.</a:t>
+              <a:rPr dirty="0"/>
+              <a:t>function App() {</a:t>
             </a:r>
           </a:p>
           <a:p>
@@ -6014,31 +6044,16 @@
               <a:defRPr sz="2200"/>
             </a:pPr>
             <a:r>
-              <a:t>Typing in inputs.</a:t>
-            </a:r>
-          </a:p>
-          <a:p>
-            <a:pPr>
-              <a:defRPr sz="2200"/>
-            </a:pPr>
-            <a:r>
-              <a:t>Submitting forms.</a:t>
-            </a:r>
-          </a:p>
-          <a:p>
-            <a:pPr>
-              <a:defRPr sz="2200"/>
-            </a:pPr>
-            <a:r>
-              <a:t>Selecting options.</a:t>
-            </a:r>
-          </a:p>
-          <a:p>
-            <a:pPr>
-              <a:defRPr sz="2200"/>
-            </a:pPr>
-            <a:r>
-              <a:t>Hovering elements.</a:t>
+              <a:rPr dirty="0"/>
+              <a:t>function </a:t>
+            </a:r>
+            <a:r>
+              <a:rPr dirty="0" err="1"/>
+              <a:t>handleClick</a:t>
+            </a:r>
+            <a:r>
+              <a:rPr dirty="0"/>
+              <a:t>() {</a:t>
             </a:r>
           </a:p>
         </p:txBody>
@@ -6084,7 +6099,7 @@
           <a:lstStyle/>
           <a:p>
             <a:r>
-              <a:t>Why it matters (cont.)</a:t>
+              <a:t>Why it matters</a:t>
             </a:r>
           </a:p>
         </p:txBody>
@@ -6108,7 +6123,7 @@
               <a:defRPr sz="2200"/>
             </a:pPr>
             <a:r>
-              <a:t>Pressing keys.</a:t>
+              <a:t>Event handling lets the UI react to user input in real time:</a:t>
             </a:r>
           </a:p>
           <a:p>
@@ -6116,7 +6131,39 @@
               <a:defRPr sz="2200"/>
             </a:pPr>
             <a:r>
-              <a:t>Without event handling, a React app would just display static content.</a:t>
+              <a:t>Clicking buttons.</a:t>
+            </a:r>
+          </a:p>
+          <a:p>
+            <a:pPr>
+              <a:defRPr sz="2200"/>
+            </a:pPr>
+            <a:r>
+              <a:t>Typing in inputs.</a:t>
+            </a:r>
+          </a:p>
+          <a:p>
+            <a:pPr>
+              <a:defRPr sz="2200"/>
+            </a:pPr>
+            <a:r>
+              <a:t>Submitting forms.</a:t>
+            </a:r>
+          </a:p>
+          <a:p>
+            <a:pPr>
+              <a:defRPr sz="2200"/>
+            </a:pPr>
+            <a:r>
+              <a:t>Selecting options.</a:t>
+            </a:r>
+          </a:p>
+          <a:p>
+            <a:pPr>
+              <a:defRPr sz="2200"/>
+            </a:pPr>
+            <a:r>
+              <a:t>Hovering elements.</a:t>
             </a:r>
           </a:p>
         </p:txBody>
@@ -6162,7 +6209,7 @@
           <a:lstStyle/>
           <a:p>
             <a:r>
-              <a:t>React event syntax</a:t>
+              <a:t>Why it matters (cont.)</a:t>
             </a:r>
           </a:p>
         </p:txBody>
@@ -6186,7 +6233,15 @@
               <a:defRPr sz="2200"/>
             </a:pPr>
             <a:r>
-              <a:t>React uses JSX-style event names, not HTML-style lowercase names.</a:t>
+              <a:t>Pressing keys.</a:t>
+            </a:r>
+          </a:p>
+          <a:p>
+            <a:pPr>
+              <a:defRPr sz="2200"/>
+            </a:pPr>
+            <a:r>
+              <a:t>Without event handling, a React app would just display static content.</a:t>
             </a:r>
           </a:p>
         </p:txBody>
@@ -6232,10 +6287,8 @@
           <a:lstStyle/>
           <a:p>
             <a:r>
-              <a:rPr lang="en-IN" dirty="0" err="1"/>
-              <a:t>onMouseEnter</a:t>
-            </a:r>
-            <a:endParaRPr lang="en-IN" dirty="0"/>
+              <a:t>React event syntax</a:t>
+            </a:r>
           </a:p>
         </p:txBody>
       </p:sp>
@@ -6258,23 +6311,7 @@
               <a:defRPr sz="2200"/>
             </a:pPr>
             <a:r>
-              <a:t>&lt;button onClick={handleClick}&gt;Click&lt;/button&gt;</a:t>
-            </a:r>
-          </a:p>
-          <a:p>
-            <a:pPr>
-              <a:defRPr sz="2200"/>
-            </a:pPr>
-            <a:r>
-              <a:t>&lt;input onChange={handleChange} /&gt;</a:t>
-            </a:r>
-          </a:p>
-          <a:p>
-            <a:pPr>
-              <a:defRPr sz="2200"/>
-            </a:pPr>
-            <a:r>
-              <a:t>&lt;form onSubmit={handleSubmit}&gt;</a:t>
+              <a:t>React uses JSX-style event names, not HTML-style lowercase names.</a:t>
             </a:r>
           </a:p>
         </p:txBody>
@@ -6358,7 +6395,15 @@
             </a:pPr>
             <a:r>
               <a:rPr dirty="0"/>
-              <a:t>while ReactJS is a library built on top of JavaScript for building user interfaces, especially dynamic ones.</a:t>
+              <a:t>while ReactJS is a </a:t>
+            </a:r>
+            <a:r>
+              <a:rPr u="sng" dirty="0"/>
+              <a:t>library</a:t>
+            </a:r>
+            <a:r>
+              <a:rPr dirty="0"/>
+              <a:t> built on top of JavaScript for building user interfaces, especially dynamic ones.</a:t>
             </a:r>
           </a:p>
         </p:txBody>
@@ -6404,8 +6449,10 @@
           <a:lstStyle/>
           <a:p>
             <a:r>
-              <a:t>Passing event handlers</a:t>
-            </a:r>
+              <a:rPr lang="en-IN" dirty="0" err="1"/>
+              <a:t>onMouseEnter</a:t>
+            </a:r>
+            <a:endParaRPr lang="en-IN" dirty="0"/>
           </a:p>
         </p:txBody>
       </p:sp>
@@ -6428,7 +6475,7 @@
               <a:defRPr sz="2200"/>
             </a:pPr>
             <a:r>
-              <a:t>You usually pass the function reference, not call it directly.</a:t>
+              <a:t>&lt;button onClick={handleClick}&gt;Click&lt;/button&gt;</a:t>
             </a:r>
           </a:p>
           <a:p>
@@ -6436,7 +6483,15 @@
               <a:defRPr sz="2200"/>
             </a:pPr>
             <a:r>
-              <a:t>&lt;button onClick={handleClick}&gt;Click&lt;/button&gt;</a:t>
+              <a:t>&lt;input onChange={handleChange} /&gt;</a:t>
+            </a:r>
+          </a:p>
+          <a:p>
+            <a:pPr>
+              <a:defRPr sz="2200"/>
+            </a:pPr>
+            <a:r>
+              <a:t>&lt;form onSubmit={handleSubmit}&gt;</a:t>
             </a:r>
           </a:p>
         </p:txBody>
@@ -6481,7 +6536,9 @@
           <a:bodyPr/>
           <a:lstStyle/>
           <a:p>
-            <a:endParaRPr dirty="0"/>
+            <a:r>
+              <a:t>Passing event handlers</a:t>
+            </a:r>
           </a:p>
         </p:txBody>
       </p:sp>
@@ -6504,24 +6561,7 @@
               <a:defRPr sz="2200"/>
             </a:pPr>
             <a:r>
-              <a:rPr dirty="0"/>
-              <a:t>&lt;button </a:t>
-            </a:r>
-            <a:r>
-              <a:rPr dirty="0" err="1"/>
-              <a:t>onClick</a:t>
-            </a:r>
-            <a:r>
-              <a:rPr dirty="0"/>
-              <a:t>={</a:t>
-            </a:r>
-            <a:r>
-              <a:rPr dirty="0" err="1"/>
-              <a:t>handleClick</a:t>
-            </a:r>
-            <a:r>
-              <a:rPr dirty="0"/>
-              <a:t>()}&gt;Click&lt;/button&gt;</a:t>
+              <a:t>You usually pass the function reference, not call it directly.</a:t>
             </a:r>
           </a:p>
           <a:p>
@@ -6529,16 +6569,7 @@
               <a:defRPr sz="2200"/>
             </a:pPr>
             <a:r>
-              <a:rPr dirty="0"/>
-              <a:t>The first one runs when the event happens. The second one runs immediately</a:t>
-            </a:r>
-            <a:r>
-              <a:rPr lang="en-US" dirty="0"/>
-              <a:t> </a:t>
-            </a:r>
-            <a:r>
-              <a:rPr dirty="0"/>
-              <a:t>during render.</a:t>
+              <a:t>&lt;button onClick={handleClick}&gt;Click&lt;/button&gt;</a:t>
             </a:r>
           </a:p>
         </p:txBody>
@@ -6583,9 +6614,7 @@
           <a:bodyPr/>
           <a:lstStyle/>
           <a:p>
-            <a:r>
-              <a:t>Event object</a:t>
-            </a:r>
+            <a:endParaRPr dirty="0"/>
           </a:p>
         </p:txBody>
       </p:sp>
@@ -6608,7 +6637,24 @@
               <a:defRPr sz="2200"/>
             </a:pPr>
             <a:r>
-              <a:t>React gives your handler an event object with information about what happened.</a:t>
+              <a:rPr dirty="0"/>
+              <a:t>&lt;button </a:t>
+            </a:r>
+            <a:r>
+              <a:rPr dirty="0" err="1"/>
+              <a:t>onClick</a:t>
+            </a:r>
+            <a:r>
+              <a:rPr dirty="0"/>
+              <a:t>={</a:t>
+            </a:r>
+            <a:r>
+              <a:rPr dirty="0" err="1"/>
+              <a:t>handleClick</a:t>
+            </a:r>
+            <a:r>
+              <a:rPr dirty="0"/>
+              <a:t>()}&gt;Click&lt;/button&gt;</a:t>
             </a:r>
           </a:p>
           <a:p>
@@ -6616,7 +6662,16 @@
               <a:defRPr sz="2200"/>
             </a:pPr>
             <a:r>
-              <a:t>function handleChange(event) {</a:t>
+              <a:rPr dirty="0"/>
+              <a:t>The first one runs when the event happens. The second one runs immediately</a:t>
+            </a:r>
+            <a:r>
+              <a:rPr lang="en-US" dirty="0"/>
+              <a:t> </a:t>
+            </a:r>
+            <a:r>
+              <a:rPr dirty="0"/>
+              <a:t>during render.</a:t>
             </a:r>
           </a:p>
         </p:txBody>
@@ -6662,7 +6717,7 @@
           <a:lstStyle/>
           <a:p>
             <a:r>
-              <a:t>Common uses:</a:t>
+              <a:t>Event object</a:t>
             </a:r>
           </a:p>
         </p:txBody>
@@ -6686,7 +6741,7 @@
               <a:defRPr sz="2200"/>
             </a:pPr>
             <a:r>
-              <a:t>event.target to read the element that triggered the event.</a:t>
+              <a:t>React gives your handler an event object with information about what happened.</a:t>
             </a:r>
           </a:p>
           <a:p>
@@ -6694,15 +6749,7 @@
               <a:defRPr sz="2200"/>
             </a:pPr>
             <a:r>
-              <a:t>event.preventDefault() to stop default behavior.</a:t>
-            </a:r>
-          </a:p>
-          <a:p>
-            <a:pPr>
-              <a:defRPr sz="2200"/>
-            </a:pPr>
-            <a:r>
-              <a:t>event.key for keyboard events.</a:t>
+              <a:t>function handleChange(event) {</a:t>
             </a:r>
           </a:p>
         </p:txBody>
@@ -6748,7 +6795,7 @@
           <a:lstStyle/>
           <a:p>
             <a:r>
-              <a:t>Click events</a:t>
+              <a:t>Common uses:</a:t>
             </a:r>
           </a:p>
         </p:txBody>
@@ -6772,7 +6819,7 @@
               <a:defRPr sz="2200"/>
             </a:pPr>
             <a:r>
-              <a:t>function App() {</a:t>
+              <a:t>event.target to read the element that triggered the event.</a:t>
             </a:r>
           </a:p>
           <a:p>
@@ -6780,7 +6827,15 @@
               <a:defRPr sz="2200"/>
             </a:pPr>
             <a:r>
-              <a:t>return &lt;button onClick={() =&gt; console.log("Clicked")}&gt;Click&lt;/button&gt;;</a:t>
+              <a:t>event.preventDefault() to stop default behavior.</a:t>
+            </a:r>
+          </a:p>
+          <a:p>
+            <a:pPr>
+              <a:defRPr sz="2200"/>
+            </a:pPr>
+            <a:r>
+              <a:t>event.key for keyboard events.</a:t>
             </a:r>
           </a:p>
         </p:txBody>
@@ -6826,7 +6881,7 @@
           <a:lstStyle/>
           <a:p>
             <a:r>
-              <a:t>Input change events</a:t>
+              <a:t>Click events</a:t>
             </a:r>
           </a:p>
         </p:txBody>
@@ -6858,7 +6913,7 @@
               <a:defRPr sz="2200"/>
             </a:pPr>
             <a:r>
-              <a:t>function handleChange(event) {</a:t>
+              <a:t>return &lt;button onClick={() =&gt; console.log("Clicked")}&gt;Click&lt;/button&gt;;</a:t>
             </a:r>
           </a:p>
         </p:txBody>
@@ -6904,7 +6959,7 @@
           <a:lstStyle/>
           <a:p>
             <a:r>
-              <a:t>Form submit events</a:t>
+              <a:t>Input change events</a:t>
             </a:r>
           </a:p>
         </p:txBody>
@@ -6936,7 +6991,7 @@
               <a:defRPr sz="2200"/>
             </a:pPr>
             <a:r>
-              <a:t>function handleSubmit(event) {</a:t>
+              <a:t>function handleChange(event) {</a:t>
             </a:r>
           </a:p>
         </p:txBody>
@@ -6981,7 +7036,9 @@
           <a:bodyPr/>
           <a:lstStyle/>
           <a:p>
-            <a:endParaRPr dirty="0"/>
+            <a:r>
+              <a:t>Form submit events</a:t>
+            </a:r>
           </a:p>
         </p:txBody>
       </p:sp>
@@ -7004,7 +7061,7 @@
               <a:defRPr sz="2200"/>
             </a:pPr>
             <a:r>
-              <a:t>return (</a:t>
+              <a:t>function App() {</a:t>
             </a:r>
           </a:p>
           <a:p>
@@ -7012,23 +7069,7 @@
               <a:defRPr sz="2200"/>
             </a:pPr>
             <a:r>
-              <a:t>&lt;form onSubmit={handleSubmit}&gt;</a:t>
-            </a:r>
-          </a:p>
-          <a:p>
-            <a:pPr>
-              <a:defRPr sz="2200"/>
-            </a:pPr>
-            <a:r>
-              <a:t>&lt;button type="submit"&gt;Submit&lt;/button&gt;</a:t>
-            </a:r>
-          </a:p>
-          <a:p>
-            <a:pPr>
-              <a:defRPr sz="2200"/>
-            </a:pPr>
-            <a:r>
-              <a:t>&lt;/form&gt;</a:t>
+              <a:t>function handleSubmit(event) {</a:t>
             </a:r>
           </a:p>
         </p:txBody>
@@ -7073,9 +7114,7 @@
           <a:bodyPr/>
           <a:lstStyle/>
           <a:p>
-            <a:r>
-              <a:t>Keyboard events</a:t>
-            </a:r>
+            <a:endParaRPr dirty="0"/>
           </a:p>
         </p:txBody>
       </p:sp>
@@ -7098,7 +7137,7 @@
               <a:defRPr sz="2200"/>
             </a:pPr>
             <a:r>
-              <a:t>function App() {</a:t>
+              <a:t>return (</a:t>
             </a:r>
           </a:p>
           <a:p>
@@ -7106,7 +7145,23 @@
               <a:defRPr sz="2200"/>
             </a:pPr>
             <a:r>
-              <a:t>function handleKeyDown(event) {</a:t>
+              <a:t>&lt;form onSubmit={handleSubmit}&gt;</a:t>
+            </a:r>
+          </a:p>
+          <a:p>
+            <a:pPr>
+              <a:defRPr sz="2200"/>
+            </a:pPr>
+            <a:r>
+              <a:t>&lt;button type="submit"&gt;Submit&lt;/button&gt;</a:t>
+            </a:r>
+          </a:p>
+          <a:p>
+            <a:pPr>
+              <a:defRPr sz="2200"/>
+            </a:pPr>
+            <a:r>
+              <a:t>&lt;/form&gt;</a:t>
             </a:r>
           </a:p>
         </p:txBody>
@@ -7152,7 +7207,7 @@
           <a:lstStyle/>
           <a:p>
             <a:r>
-              <a:t>Passing arguments to handlers</a:t>
+              <a:t>Keyboard events</a:t>
             </a:r>
           </a:p>
         </p:txBody>
@@ -7176,7 +7231,7 @@
               <a:defRPr sz="2200"/>
             </a:pPr>
             <a:r>
-              <a:t>If you need to pass extra data, use an arrow function.</a:t>
+              <a:t>function App() {</a:t>
             </a:r>
           </a:p>
           <a:p>
@@ -7184,15 +7239,7 @@
               <a:defRPr sz="2200"/>
             </a:pPr>
             <a:r>
-              <a:t>function App() {</a:t>
-            </a:r>
-          </a:p>
-          <a:p>
-            <a:pPr>
-              <a:defRPr sz="2200"/>
-            </a:pPr>
-            <a:r>
-              <a:t>function greet(name) {</a:t>
+              <a:t>function handleKeyDown(event) {</a:t>
             </a:r>
           </a:p>
         </p:txBody>
@@ -7315,7 +7362,9 @@
           <a:bodyPr/>
           <a:lstStyle/>
           <a:p>
-            <a:endParaRPr dirty="0"/>
+            <a:r>
+              <a:t>Passing arguments to handlers</a:t>
+            </a:r>
           </a:p>
         </p:txBody>
       </p:sp>
@@ -7338,7 +7387,23 @@
               <a:defRPr sz="2200"/>
             </a:pPr>
             <a:r>
-              <a:t>This is very common when mapping over lists or handling item-specific actions.</a:t>
+              <a:t>If you need to pass extra data, use an arrow function.</a:t>
+            </a:r>
+          </a:p>
+          <a:p>
+            <a:pPr>
+              <a:defRPr sz="2200"/>
+            </a:pPr>
+            <a:r>
+              <a:t>function App() {</a:t>
+            </a:r>
+          </a:p>
+          <a:p>
+            <a:pPr>
+              <a:defRPr sz="2200"/>
+            </a:pPr>
+            <a:r>
+              <a:t>function greet(name) {</a:t>
             </a:r>
           </a:p>
         </p:txBody>
@@ -7383,9 +7448,7 @@
           <a:bodyPr/>
           <a:lstStyle/>
           <a:p>
-            <a:r>
-              <a:t>Preventing default behavior</a:t>
-            </a:r>
+            <a:endParaRPr dirty="0"/>
           </a:p>
         </p:txBody>
       </p:sp>
@@ -7408,27 +7471,7 @@
               <a:defRPr sz="2200"/>
             </a:pPr>
             <a:r>
-              <a:t>Use preventDefault() when you want to stop things like form reloads or link</a:t>
-            </a:r>
-            <a:br/>
-            <a:r>
-              <a:t>navigation.</a:t>
-            </a:r>
-          </a:p>
-          <a:p>
-            <a:pPr>
-              <a:defRPr sz="2200"/>
-            </a:pPr>
-            <a:r>
-              <a:t>function App() {</a:t>
-            </a:r>
-          </a:p>
-          <a:p>
-            <a:pPr>
-              <a:defRPr sz="2200"/>
-            </a:pPr>
-            <a:r>
-              <a:t>function handleSubmit(event) {</a:t>
+              <a:t>This is very common when mapping over lists or handling item-specific actions.</a:t>
             </a:r>
           </a:p>
         </p:txBody>
@@ -7473,7 +7516,9 @@
           <a:bodyPr/>
           <a:lstStyle/>
           <a:p>
-            <a:endParaRPr dirty="0"/>
+            <a:r>
+              <a:t>Preventing default behavior</a:t>
+            </a:r>
           </a:p>
         </p:txBody>
       </p:sp>
@@ -7496,7 +7541,11 @@
               <a:defRPr sz="2200"/>
             </a:pPr>
             <a:r>
-              <a:t>return (</a:t>
+              <a:t>Use preventDefault() when you want to stop things like form reloads or link</a:t>
+            </a:r>
+            <a:br/>
+            <a:r>
+              <a:t>navigation.</a:t>
             </a:r>
           </a:p>
           <a:p>
@@ -7504,7 +7553,7 @@
               <a:defRPr sz="2200"/>
             </a:pPr>
             <a:r>
-              <a:t>&lt;form onSubmit={handleSubmit}&gt;</a:t>
+              <a:t>function App() {</a:t>
             </a:r>
           </a:p>
           <a:p>
@@ -7512,15 +7561,7 @@
               <a:defRPr sz="2200"/>
             </a:pPr>
             <a:r>
-              <a:t>&lt;button type="submit"&gt;Send&lt;/button&gt;</a:t>
-            </a:r>
-          </a:p>
-          <a:p>
-            <a:pPr>
-              <a:defRPr sz="2200"/>
-            </a:pPr>
-            <a:r>
-              <a:t>&lt;/form&gt;</a:t>
+              <a:t>function handleSubmit(event) {</a:t>
             </a:r>
           </a:p>
         </p:txBody>
@@ -7565,9 +7606,7 @@
           <a:bodyPr/>
           <a:lstStyle/>
           <a:p>
-            <a:r>
-              <a:t>React synthetic events</a:t>
-            </a:r>
+            <a:endParaRPr dirty="0"/>
           </a:p>
         </p:txBody>
       </p:sp>
@@ -7590,42 +7629,31 @@
               <a:defRPr sz="2200"/>
             </a:pPr>
             <a:r>
-              <a:rPr dirty="0"/>
-              <a:t>React uses its own event system called </a:t>
-            </a:r>
-            <a:r>
-              <a:rPr dirty="0" err="1"/>
-              <a:t>SyntheticEvent</a:t>
-            </a:r>
-            <a:r>
-              <a:rPr dirty="0"/>
-              <a:t> to give a consistent</a:t>
-            </a:r>
-            <a:r>
-              <a:rPr lang="en-US" dirty="0"/>
-              <a:t> </a:t>
-            </a:r>
-            <a:r>
-              <a:rPr dirty="0"/>
-              <a:t>interface across browsers. </a:t>
-            </a:r>
-            <a:endParaRPr lang="en-US" dirty="0"/>
+              <a:t>return (</a:t>
+            </a:r>
           </a:p>
           <a:p>
             <a:pPr>
               <a:defRPr sz="2200"/>
             </a:pPr>
             <a:r>
-              <a:rPr dirty="0"/>
-              <a:t>For most everyday work, you use it the same way as a</a:t>
-            </a:r>
-            <a:r>
-              <a:rPr lang="en-US" dirty="0"/>
-              <a:t> </a:t>
-            </a:r>
-            <a:r>
-              <a:rPr dirty="0"/>
-              <a:t>normal event object.</a:t>
+              <a:t>&lt;form onSubmit={handleSubmit}&gt;</a:t>
+            </a:r>
+          </a:p>
+          <a:p>
+            <a:pPr>
+              <a:defRPr sz="2200"/>
+            </a:pPr>
+            <a:r>
+              <a:t>&lt;button type="submit"&gt;Send&lt;/button&gt;</a:t>
+            </a:r>
+          </a:p>
+          <a:p>
+            <a:pPr>
+              <a:defRPr sz="2200"/>
+            </a:pPr>
+            <a:r>
+              <a:t>&lt;/form&gt;</a:t>
             </a:r>
           </a:p>
         </p:txBody>
@@ -7671,7 +7699,7 @@
           <a:lstStyle/>
           <a:p>
             <a:r>
-              <a:t>Common mistakes</a:t>
+              <a:t>React synthetic events</a:t>
             </a:r>
           </a:p>
         </p:txBody>
@@ -7695,39 +7723,42 @@
               <a:defRPr sz="2200"/>
             </a:pPr>
             <a:r>
-              <a:t>Using onclick instead of onClick.</a:t>
-            </a:r>
+              <a:rPr dirty="0"/>
+              <a:t>React uses its own event system called </a:t>
+            </a:r>
+            <a:r>
+              <a:rPr dirty="0" err="1"/>
+              <a:t>SyntheticEvent</a:t>
+            </a:r>
+            <a:r>
+              <a:rPr dirty="0"/>
+              <a:t> to give a consistent</a:t>
+            </a:r>
+            <a:r>
+              <a:rPr lang="en-US" dirty="0"/>
+              <a:t> </a:t>
+            </a:r>
+            <a:r>
+              <a:rPr dirty="0"/>
+              <a:t>interface across browsers. </a:t>
+            </a:r>
+            <a:endParaRPr lang="en-US" dirty="0"/>
           </a:p>
           <a:p>
             <a:pPr>
               <a:defRPr sz="2200"/>
             </a:pPr>
             <a:r>
-              <a:t>Calling the handler immediately instead of passing it.</a:t>
-            </a:r>
-          </a:p>
-          <a:p>
-            <a:pPr>
-              <a:defRPr sz="2200"/>
-            </a:pPr>
-            <a:r>
-              <a:t>Forgetting preventDefault() in forms.</a:t>
-            </a:r>
-          </a:p>
-          <a:p>
-            <a:pPr>
-              <a:defRPr sz="2200"/>
-            </a:pPr>
-            <a:r>
-              <a:t>Not reading values from event.target.</a:t>
-            </a:r>
-          </a:p>
-          <a:p>
-            <a:pPr>
-              <a:defRPr sz="2200"/>
-            </a:pPr>
-            <a:r>
-              <a:t>Overusing inline functions when the logic is complex.</a:t>
+              <a:rPr dirty="0"/>
+              <a:t>For most everyday work, you use it the same way as a</a:t>
+            </a:r>
+            <a:r>
+              <a:rPr lang="en-US" dirty="0"/>
+              <a:t> </a:t>
+            </a:r>
+            <a:r>
+              <a:rPr dirty="0"/>
+              <a:t>normal event object.</a:t>
             </a:r>
           </a:p>
         </p:txBody>
@@ -7773,7 +7804,7 @@
           <a:lstStyle/>
           <a:p>
             <a:r>
-              <a:t>Why it is important in React</a:t>
+              <a:t>Common mistakes</a:t>
             </a:r>
           </a:p>
         </p:txBody>
@@ -7790,25 +7821,14 @@
         </p:nvSpPr>
         <p:spPr/>
         <p:txBody>
-          <a:bodyPr>
-            <a:normAutofit/>
-          </a:bodyPr>
+          <a:bodyPr/>
           <a:lstStyle/>
           <a:p>
             <a:pPr>
               <a:defRPr sz="2200"/>
             </a:pPr>
             <a:r>
-              <a:rPr dirty="0"/>
-              <a:t>Event handling connects user actions to state updates. That means it is closely</a:t>
-            </a:r>
-            <a:r>
-              <a:rPr lang="en-US" dirty="0"/>
-              <a:t> </a:t>
-            </a:r>
-            <a:r>
-              <a:rPr dirty="0"/>
-              <a:t>tied to:</a:t>
+              <a:t>Using onclick instead of onClick.</a:t>
             </a:r>
           </a:p>
           <a:p>
@@ -7816,12 +7836,7 @@
               <a:defRPr sz="2200"/>
             </a:pPr>
             <a:r>
-              <a:rPr dirty="0" err="1"/>
-              <a:t>useState</a:t>
-            </a:r>
-            <a:r>
-              <a:rPr dirty="0"/>
-              <a:t>.</a:t>
+              <a:t>Calling the handler immediately instead of passing it.</a:t>
             </a:r>
           </a:p>
           <a:p>
@@ -7829,8 +7844,7 @@
               <a:defRPr sz="2200"/>
             </a:pPr>
             <a:r>
-              <a:rPr dirty="0"/>
-              <a:t>Forms.</a:t>
+              <a:t>Forgetting preventDefault() in forms.</a:t>
             </a:r>
           </a:p>
           <a:p>
@@ -7838,8 +7852,7 @@
               <a:defRPr sz="2200"/>
             </a:pPr>
             <a:r>
-              <a:rPr dirty="0"/>
-              <a:t>Conditional rendering.</a:t>
+              <a:t>Not reading values from event.target.</a:t>
             </a:r>
           </a:p>
           <a:p>
@@ -7847,17 +7860,7 @@
               <a:defRPr sz="2200"/>
             </a:pPr>
             <a:r>
-              <a:rPr dirty="0"/>
-              <a:t>Lists.</a:t>
-            </a:r>
-          </a:p>
-          <a:p>
-            <a:pPr>
-              <a:defRPr sz="2200"/>
-            </a:pPr>
-            <a:r>
-              <a:rPr dirty="0"/>
-              <a:t>Data updates.</a:t>
+              <a:t>Overusing inline functions when the logic is complex.</a:t>
             </a:r>
           </a:p>
         </p:txBody>
@@ -7903,6 +7906,136 @@
           <a:lstStyle/>
           <a:p>
             <a:r>
+              <a:t>Why it is important in React</a:t>
+            </a:r>
+          </a:p>
+        </p:txBody>
+      </p:sp>
+      <p:sp>
+        <p:nvSpPr>
+          <p:cNvPr id="3" name="Content Placeholder 2"/>
+          <p:cNvSpPr>
+            <a:spLocks noGrp="1"/>
+          </p:cNvSpPr>
+          <p:nvPr>
+            <p:ph idx="1"/>
+          </p:nvPr>
+        </p:nvSpPr>
+        <p:spPr/>
+        <p:txBody>
+          <a:bodyPr>
+            <a:normAutofit/>
+          </a:bodyPr>
+          <a:lstStyle/>
+          <a:p>
+            <a:pPr>
+              <a:defRPr sz="2200"/>
+            </a:pPr>
+            <a:r>
+              <a:rPr dirty="0"/>
+              <a:t>Event handling connects user actions to state updates. That means it is closely</a:t>
+            </a:r>
+            <a:r>
+              <a:rPr lang="en-US" dirty="0"/>
+              <a:t> </a:t>
+            </a:r>
+            <a:r>
+              <a:rPr dirty="0"/>
+              <a:t>tied to:</a:t>
+            </a:r>
+          </a:p>
+          <a:p>
+            <a:pPr>
+              <a:defRPr sz="2200"/>
+            </a:pPr>
+            <a:r>
+              <a:rPr dirty="0" err="1"/>
+              <a:t>useState</a:t>
+            </a:r>
+            <a:r>
+              <a:rPr dirty="0"/>
+              <a:t>.</a:t>
+            </a:r>
+          </a:p>
+          <a:p>
+            <a:pPr>
+              <a:defRPr sz="2200"/>
+            </a:pPr>
+            <a:r>
+              <a:rPr dirty="0"/>
+              <a:t>Forms.</a:t>
+            </a:r>
+          </a:p>
+          <a:p>
+            <a:pPr>
+              <a:defRPr sz="2200"/>
+            </a:pPr>
+            <a:r>
+              <a:rPr dirty="0"/>
+              <a:t>Conditional rendering.</a:t>
+            </a:r>
+          </a:p>
+          <a:p>
+            <a:pPr>
+              <a:defRPr sz="2200"/>
+            </a:pPr>
+            <a:r>
+              <a:rPr dirty="0"/>
+              <a:t>Lists.</a:t>
+            </a:r>
+          </a:p>
+          <a:p>
+            <a:pPr>
+              <a:defRPr sz="2200"/>
+            </a:pPr>
+            <a:r>
+              <a:rPr dirty="0"/>
+              <a:t>Data updates.</a:t>
+            </a:r>
+          </a:p>
+        </p:txBody>
+      </p:sp>
+    </p:spTree>
+  </p:cSld>
+  <p:clrMapOvr>
+    <a:masterClrMapping/>
+  </p:clrMapOvr>
+</p:sld>
+</file>
+
+<file path=ppt/slides/slide127.xml><?xml version="1.0" encoding="utf-8"?>
+<p:sld xmlns:a="http://schemas.openxmlformats.org/drawingml/2006/main" xmlns:r="http://schemas.openxmlformats.org/officeDocument/2006/relationships" xmlns:p="http://schemas.openxmlformats.org/presentationml/2006/main">
+  <p:cSld>
+    <p:spTree>
+      <p:nvGrpSpPr>
+        <p:cNvPr id="1" name=""/>
+        <p:cNvGrpSpPr/>
+        <p:nvPr/>
+      </p:nvGrpSpPr>
+      <p:grpSpPr>
+        <a:xfrm>
+          <a:off x="0" y="0"/>
+          <a:ext cx="0" cy="0"/>
+          <a:chOff x="0" y="0"/>
+          <a:chExt cx="0" cy="0"/>
+        </a:xfrm>
+      </p:grpSpPr>
+      <p:sp>
+        <p:nvSpPr>
+          <p:cNvPr id="2" name="Title 1"/>
+          <p:cNvSpPr>
+            <a:spLocks noGrp="1"/>
+          </p:cNvSpPr>
+          <p:nvPr>
+            <p:ph type="title"/>
+          </p:nvPr>
+        </p:nvSpPr>
+        <p:spPr/>
+        <p:txBody>
+          <a:bodyPr/>
+          <a:lstStyle/>
+          <a:p>
+            <a:r>
               <a:t>Why it is important in React (cont.)</a:t>
             </a:r>
           </a:p>
@@ -10337,6 +10470,7 @@
           <a:lstStyle/>
           <a:p>
             <a:r>
+              <a:rPr dirty="0"/>
               <a:t>What is JSX?</a:t>
             </a:r>
           </a:p>
@@ -10782,7 +10916,8 @@
           <a:bodyPr/>
           <a:lstStyle/>
           <a:p>
-            <a:pPr>
+            <a:pPr marL="573088" indent="0">
+              <a:buNone/>
               <a:defRPr sz="2000"/>
             </a:pPr>
             <a:r>
@@ -11122,6 +11257,7 @@
               <a:defRPr sz="2000"/>
             </a:pPr>
             <a:r>
+              <a:rPr dirty="0"/>
               <a:t>}</a:t>
             </a:r>
           </a:p>
@@ -11130,14 +11266,17 @@
               <a:defRPr sz="2000"/>
             </a:pPr>
             <a:r>
+              <a:rPr dirty="0"/>
               <a:t>This is one of the most important JSX rules.</a:t>
             </a:r>
           </a:p>
           <a:p>
-            <a:pPr>
-              <a:defRPr sz="2000"/>
-            </a:pPr>
-            <a:r>
+            <a:pPr marL="573088" indent="0">
+              <a:buNone/>
+              <a:defRPr sz="2000"/>
+            </a:pPr>
+            <a:r>
+              <a:rPr dirty="0"/>
               <a:t>2. Close all tags</a:t>
             </a:r>
           </a:p>
@@ -11146,6 +11285,7 @@
               <a:defRPr sz="2000"/>
             </a:pPr>
             <a:r>
+              <a:rPr dirty="0"/>
               <a:t>Every tag must be properly closed.</a:t>
             </a:r>
           </a:p>
@@ -11154,14 +11294,32 @@
               <a:defRPr sz="2000"/>
             </a:pPr>
             <a:r>
-              <a:t>&lt;img src="logo.png" alt="Logo" /&gt;</a:t>
-            </a:r>
-          </a:p>
-          <a:p>
-            <a:pPr>
-              <a:defRPr sz="2000"/>
-            </a:pPr>
-            <a:r>
+              <a:rPr dirty="0"/>
+              <a:t>&lt;</a:t>
+            </a:r>
+            <a:r>
+              <a:rPr dirty="0" err="1"/>
+              <a:t>img</a:t>
+            </a:r>
+            <a:r>
+              <a:rPr dirty="0"/>
+              <a:t> </a:t>
+            </a:r>
+            <a:r>
+              <a:rPr dirty="0" err="1"/>
+              <a:t>src</a:t>
+            </a:r>
+            <a:r>
+              <a:rPr dirty="0"/>
+              <a:t>="logo.png" alt="Logo" /&gt;</a:t>
+            </a:r>
+          </a:p>
+          <a:p>
+            <a:pPr>
+              <a:defRPr sz="2000"/>
+            </a:pPr>
+            <a:r>
+              <a:rPr dirty="0"/>
               <a:t>&lt;input type="text" /&gt;</a:t>
             </a:r>
           </a:p>
@@ -12817,6 +12975,7 @@
           <a:lstStyle/>
           <a:p>
             <a:r>
+              <a:rPr dirty="0"/>
               <a:t>React Components</a:t>
             </a:r>
           </a:p>
@@ -12880,7 +13039,13 @@
   <p:cSld>
     <p:spTree>
       <p:nvGrpSpPr>
-        <p:cNvPr id="1" name=""/>
+        <p:cNvPr id="1" name="">
+          <a:extLst>
+            <a:ext uri="{FF2B5EF4-FFF2-40B4-BE49-F238E27FC236}">
+              <a16:creationId xmlns:a16="http://schemas.microsoft.com/office/drawing/2014/main" id="{0F7B3853-A03A-7D3F-BC7B-DC467A6A14E6}"/>
+            </a:ext>
+          </a:extLst>
+        </p:cNvPr>
         <p:cNvGrpSpPr/>
         <p:nvPr/>
       </p:nvGrpSpPr>
@@ -12894,7 +13059,13 @@
       </p:grpSpPr>
       <p:sp>
         <p:nvSpPr>
-          <p:cNvPr id="2" name="Title 1"/>
+          <p:cNvPr id="2" name="Title 1">
+            <a:extLst>
+              <a:ext uri="{FF2B5EF4-FFF2-40B4-BE49-F238E27FC236}">
+                <a16:creationId xmlns:a16="http://schemas.microsoft.com/office/drawing/2014/main" id="{A243921D-D760-67C9-05B0-36BBA076A047}"/>
+              </a:ext>
+            </a:extLst>
+          </p:cNvPr>
           <p:cNvSpPr>
             <a:spLocks noGrp="1"/>
           </p:cNvSpPr>
@@ -12908,14 +13079,21 @@
           <a:lstStyle/>
           <a:p>
             <a:r>
-              <a:t>What a component is</a:t>
-            </a:r>
-          </a:p>
-        </p:txBody>
-      </p:sp>
-      <p:sp>
-        <p:nvSpPr>
-          <p:cNvPr id="3" name="Content Placeholder 2"/>
+              <a:rPr dirty="0"/>
+              <a:t>React Components</a:t>
+            </a:r>
+          </a:p>
+        </p:txBody>
+      </p:sp>
+      <p:sp>
+        <p:nvSpPr>
+          <p:cNvPr id="3" name="Content Placeholder 2">
+            <a:extLst>
+              <a:ext uri="{FF2B5EF4-FFF2-40B4-BE49-F238E27FC236}">
+                <a16:creationId xmlns:a16="http://schemas.microsoft.com/office/drawing/2014/main" id="{EEA6C242-15F0-9E06-98F5-21B69C05E287}"/>
+              </a:ext>
+            </a:extLst>
+          </p:cNvPr>
           <p:cNvSpPr>
             <a:spLocks noGrp="1"/>
           </p:cNvSpPr>
@@ -12933,49 +13111,62 @@
             </a:pPr>
             <a:r>
               <a:rPr dirty="0"/>
-              <a:t>A component is usually a JavaScript function or class that returns UI in JSX. </a:t>
+              <a:t>A React component is a reusable building block of the UI. </a:t>
             </a:r>
             <a:endParaRPr lang="en-US" dirty="0"/>
           </a:p>
           <a:p>
-            <a:pPr>
-              <a:defRPr sz="2000"/>
-            </a:pPr>
-            <a:r>
-              <a:rPr dirty="0"/>
-              <a:t>In modern React, function components are the standard and most common approach, while class components are older and less commonly used now.</a:t>
-            </a:r>
-          </a:p>
-          <a:p>
-            <a:pPr lvl="1">
-              <a:defRPr sz="2000"/>
-            </a:pPr>
-            <a:r>
-              <a:rPr dirty="0"/>
-              <a:t>function Greeting() {</a:t>
-            </a:r>
-          </a:p>
-          <a:p>
-            <a:pPr lvl="1">
-              <a:defRPr sz="2000"/>
-            </a:pPr>
-            <a:r>
-              <a:rPr dirty="0"/>
-              <a:t>return &lt;h1&gt;Hello, React!&lt;/h1&gt;;</a:t>
-            </a:r>
-          </a:p>
-          <a:p>
-            <a:pPr lvl="1">
-              <a:defRPr sz="2000"/>
-            </a:pPr>
-            <a:r>
-              <a:rPr dirty="0"/>
-              <a:t>}</a:t>
+            <a:pPr marL="1487488" lvl="1" indent="-457200">
+              <a:buFont typeface="+mj-lt"/>
+              <a:buAutoNum type="arabicPeriod"/>
+              <a:defRPr sz="2000"/>
+            </a:pPr>
+            <a:r>
+              <a:rPr lang="en-US" b="1" dirty="0"/>
+              <a:t>Functional Component* </a:t>
+            </a:r>
+            <a:r>
+              <a:rPr lang="en-US" dirty="0"/>
+              <a:t>: component is written as a JS function</a:t>
+            </a:r>
+          </a:p>
+          <a:p>
+            <a:pPr marL="1487488" lvl="1" indent="-457200">
+              <a:buFont typeface="+mj-lt"/>
+              <a:buAutoNum type="arabicPeriod"/>
+              <a:defRPr sz="2000"/>
+            </a:pPr>
+            <a:r>
+              <a:rPr lang="en-US" dirty="0"/>
+              <a:t>Class Component : component is written as a JS class / kind of older approach (assignment)</a:t>
+            </a:r>
+          </a:p>
+          <a:p>
+            <a:pPr marL="1487488" lvl="1" indent="-457200">
+              <a:buFont typeface="+mj-lt"/>
+              <a:buAutoNum type="arabicPeriod"/>
+              <a:defRPr sz="2000"/>
+            </a:pPr>
+            <a:endParaRPr lang="en-US" dirty="0"/>
+          </a:p>
+          <a:p>
+            <a:pPr marL="1030288" lvl="1" indent="0">
+              <a:buNone/>
+              <a:defRPr sz="2000"/>
+            </a:pPr>
+            <a:r>
+              <a:rPr lang="en-US" sz="1100" b="1" dirty="0"/>
+              <a:t>*: most commonly used approach</a:t>
             </a:r>
           </a:p>
         </p:txBody>
       </p:sp>
     </p:spTree>
+    <p:extLst>
+      <p:ext uri="{BB962C8B-B14F-4D97-AF65-F5344CB8AC3E}">
+        <p14:creationId xmlns:p14="http://schemas.microsoft.com/office/powerpoint/2010/main" val="773935684"/>
+      </p:ext>
+    </p:extLst>
   </p:cSld>
   <p:clrMapOvr>
     <a:masterClrMapping/>
@@ -13016,7 +13207,7 @@
           <a:lstStyle/>
           <a:p>
             <a:r>
-              <a:t>Why components are used</a:t>
+              <a:t>What a component is</a:t>
             </a:r>
           </a:p>
         </p:txBody>
@@ -13033,17 +13224,25 @@
         </p:nvSpPr>
         <p:spPr/>
         <p:txBody>
-          <a:bodyPr>
-            <a:normAutofit/>
-          </a:bodyPr>
-          <a:lstStyle/>
-          <a:p>
-            <a:pPr>
-              <a:defRPr sz="2000"/>
-            </a:pPr>
-            <a:r>
-              <a:rPr dirty="0"/>
-              <a:t>Components help you build apps in a clean and organized way because they:</a:t>
+          <a:bodyPr/>
+          <a:lstStyle/>
+          <a:p>
+            <a:pPr>
+              <a:defRPr sz="2000"/>
+            </a:pPr>
+            <a:r>
+              <a:rPr dirty="0"/>
+              <a:t>A component is usually a JavaScript function or class that returns UI in JSX. </a:t>
+            </a:r>
+            <a:endParaRPr lang="en-US" dirty="0"/>
+          </a:p>
+          <a:p>
+            <a:pPr>
+              <a:defRPr sz="2000"/>
+            </a:pPr>
+            <a:r>
+              <a:rPr dirty="0"/>
+              <a:t>In modern React, function components are the standard and most common approach, while class components are older and less commonly used now.</a:t>
             </a:r>
           </a:p>
           <a:p>
@@ -13052,7 +13251,7 @@
             </a:pPr>
             <a:r>
               <a:rPr dirty="0"/>
-              <a:t>Break UI into small pieces.</a:t>
+              <a:t>function Greeting() {</a:t>
             </a:r>
           </a:p>
           <a:p>
@@ -13061,7 +13260,7 @@
             </a:pPr>
             <a:r>
               <a:rPr dirty="0"/>
-              <a:t>Make code easier to read.</a:t>
+              <a:t>return &lt;h1&gt;Hello, React!&lt;/h1&gt;;</a:t>
             </a:r>
           </a:p>
           <a:p>
@@ -13070,25 +13269,7 @@
             </a:pPr>
             <a:r>
               <a:rPr dirty="0"/>
-              <a:t>Allow reuse across the app.</a:t>
-            </a:r>
-          </a:p>
-          <a:p>
-            <a:pPr lvl="1">
-              <a:defRPr sz="2000"/>
-            </a:pPr>
-            <a:r>
-              <a:rPr dirty="0"/>
-              <a:t>Keep logic close to the UI it belongs to.</a:t>
-            </a:r>
-          </a:p>
-          <a:p>
-            <a:pPr>
-              <a:defRPr sz="2000"/>
-            </a:pPr>
-            <a:r>
-              <a:rPr dirty="0"/>
-              <a:t>Instead of writing one huge file, you create separate components for things like header, button, card, form, or sidebar.</a:t>
+              <a:t>}</a:t>
             </a:r>
           </a:p>
         </p:txBody>
@@ -13134,7 +13315,7 @@
           <a:lstStyle/>
           <a:p>
             <a:r>
-              <a:t>1. Functional components</a:t>
+              <a:t>Why components are used</a:t>
             </a:r>
           </a:p>
         </p:txBody>
@@ -13151,15 +13332,17 @@
         </p:nvSpPr>
         <p:spPr/>
         <p:txBody>
-          <a:bodyPr/>
-          <a:lstStyle/>
-          <a:p>
-            <a:pPr>
-              <a:defRPr sz="2000"/>
-            </a:pPr>
-            <a:r>
-              <a:rPr dirty="0"/>
-              <a:t>These are plain JavaScript functions that return JSX.</a:t>
+          <a:bodyPr>
+            <a:normAutofit/>
+          </a:bodyPr>
+          <a:lstStyle/>
+          <a:p>
+            <a:pPr>
+              <a:defRPr sz="2000"/>
+            </a:pPr>
+            <a:r>
+              <a:rPr dirty="0"/>
+              <a:t>Components help you build apps in a clean and organized way because they:</a:t>
             </a:r>
           </a:p>
           <a:p>
@@ -13168,7 +13351,7 @@
             </a:pPr>
             <a:r>
               <a:rPr dirty="0"/>
-              <a:t>function Welcome() {</a:t>
+              <a:t>Break UI into small pieces.</a:t>
             </a:r>
           </a:p>
           <a:p>
@@ -13177,7 +13360,7 @@
             </a:pPr>
             <a:r>
               <a:rPr dirty="0"/>
-              <a:t>return &lt;h2&gt;Welcome!&lt;/h2&gt;;</a:t>
+              <a:t>Make code easier to read.</a:t>
             </a:r>
           </a:p>
           <a:p>
@@ -13186,16 +13369,25 @@
             </a:pPr>
             <a:r>
               <a:rPr dirty="0"/>
-              <a:t>}</a:t>
-            </a:r>
-          </a:p>
-          <a:p>
-            <a:pPr>
-              <a:defRPr sz="2000"/>
-            </a:pPr>
-            <a:r>
-              <a:rPr dirty="0"/>
-              <a:t>They are simple, flexible, and the preferred way to write React today. With hooks, functional components can also manage state and side effects.</a:t>
+              <a:t>Allow reuse across the app.</a:t>
+            </a:r>
+          </a:p>
+          <a:p>
+            <a:pPr lvl="1">
+              <a:defRPr sz="2000"/>
+            </a:pPr>
+            <a:r>
+              <a:rPr dirty="0"/>
+              <a:t>Keep logic close to the UI it belongs to.</a:t>
+            </a:r>
+          </a:p>
+          <a:p>
+            <a:pPr>
+              <a:defRPr sz="2000"/>
+            </a:pPr>
+            <a:r>
+              <a:rPr dirty="0"/>
+              <a:t>Instead of writing one huge file, you create separate components for things like header, button, card, form, or sidebar.</a:t>
             </a:r>
           </a:p>
         </p:txBody>
@@ -13241,7 +13433,8 @@
           <a:lstStyle/>
           <a:p>
             <a:r>
-              <a:t>2. Class components</a:t>
+              <a:rPr dirty="0"/>
+              <a:t>1. Functional components</a:t>
             </a:r>
           </a:p>
         </p:txBody>
@@ -13265,38 +13458,34 @@
               <a:defRPr sz="2000"/>
             </a:pPr>
             <a:r>
-              <a:t>These are ES6 classes that extend React.Component and use a render() method.</a:t>
-            </a:r>
-          </a:p>
-          <a:p>
-            <a:pPr>
-              <a:defRPr sz="2000"/>
-            </a:pPr>
-            <a:r>
-              <a:t>class Welcome extends React.Component {</a:t>
-            </a:r>
-          </a:p>
-          <a:p>
-            <a:pPr>
-              <a:defRPr sz="2000"/>
-            </a:pPr>
-            <a:r>
-              <a:t>render() {</a:t>
-            </a:r>
-          </a:p>
-          <a:p>
-            <a:pPr>
-              <a:defRPr sz="2000"/>
-            </a:pPr>
-            <a:r>
+              <a:rPr dirty="0"/>
+              <a:t>These are plain JavaScript functions that return JSX.</a:t>
+            </a:r>
+          </a:p>
+          <a:p>
+            <a:pPr lvl="1">
+              <a:defRPr sz="2000"/>
+            </a:pPr>
+            <a:r>
+              <a:rPr dirty="0"/>
+              <a:t>function Welcome() {</a:t>
+            </a:r>
+          </a:p>
+          <a:p>
+            <a:pPr lvl="1">
+              <a:defRPr sz="2000"/>
+            </a:pPr>
+            <a:r>
+              <a:rPr dirty="0"/>
               <a:t>return &lt;h2&gt;Welcome!&lt;/h2&gt;;</a:t>
             </a:r>
           </a:p>
           <a:p>
-            <a:pPr>
-              <a:defRPr sz="2000"/>
-            </a:pPr>
-            <a:r>
+            <a:pPr lvl="1">
+              <a:defRPr sz="2000"/>
+            </a:pPr>
+            <a:r>
+              <a:rPr dirty="0"/>
               <a:t>}</a:t>
             </a:r>
           </a:p>
@@ -13305,7 +13494,8 @@
               <a:defRPr sz="2000"/>
             </a:pPr>
             <a:r>
-              <a:t>}</a:t>
+              <a:rPr dirty="0"/>
+              <a:t>They are simple, flexible, and the preferred way to write React today. With hooks, functional components can also manage state and side effects.</a:t>
             </a:r>
           </a:p>
         </p:txBody>
@@ -13375,7 +13565,47 @@
               <a:defRPr sz="2000"/>
             </a:pPr>
             <a:r>
-              <a:t>They were more common before hooks, but most modern React code now uses function components.</a:t>
+              <a:t>These are ES6 classes that extend React.Component and use a render() method.</a:t>
+            </a:r>
+          </a:p>
+          <a:p>
+            <a:pPr>
+              <a:defRPr sz="2000"/>
+            </a:pPr>
+            <a:r>
+              <a:t>class Welcome extends React.Component {</a:t>
+            </a:r>
+          </a:p>
+          <a:p>
+            <a:pPr>
+              <a:defRPr sz="2000"/>
+            </a:pPr>
+            <a:r>
+              <a:t>render() {</a:t>
+            </a:r>
+          </a:p>
+          <a:p>
+            <a:pPr>
+              <a:defRPr sz="2000"/>
+            </a:pPr>
+            <a:r>
+              <a:t>return &lt;h2&gt;Welcome!&lt;/h2&gt;;</a:t>
+            </a:r>
+          </a:p>
+          <a:p>
+            <a:pPr>
+              <a:defRPr sz="2000"/>
+            </a:pPr>
+            <a:r>
+              <a:t>}</a:t>
+            </a:r>
+          </a:p>
+          <a:p>
+            <a:pPr>
+              <a:defRPr sz="2000"/>
+            </a:pPr>
+            <a:r>
+              <a:t>}</a:t>
             </a:r>
           </a:p>
         </p:txBody>
@@ -13421,7 +13651,7 @@
           <a:lstStyle/>
           <a:p>
             <a:r>
-              <a:t>Components with props</a:t>
+              <a:t>2. Class components</a:t>
             </a:r>
           </a:p>
         </p:txBody>
@@ -13445,47 +13675,7 @@
               <a:defRPr sz="2000"/>
             </a:pPr>
             <a:r>
-              <a:t>Components can accept props to receive data from a parent component.</a:t>
-            </a:r>
-          </a:p>
-          <a:p>
-            <a:pPr>
-              <a:defRPr sz="2000"/>
-            </a:pPr>
-            <a:r>
-              <a:t>function UserCard({ name, age }) {</a:t>
-            </a:r>
-          </a:p>
-          <a:p>
-            <a:pPr>
-              <a:defRPr sz="2000"/>
-            </a:pPr>
-            <a:r>
-              <a:t>return (</a:t>
-            </a:r>
-          </a:p>
-          <a:p>
-            <a:pPr>
-              <a:defRPr sz="2000"/>
-            </a:pPr>
-            <a:r>
-              <a:t>&lt;div&gt;</a:t>
-            </a:r>
-          </a:p>
-          <a:p>
-            <a:pPr>
-              <a:defRPr sz="2000"/>
-            </a:pPr>
-            <a:r>
-              <a:t>&lt;h3&gt;{name}&lt;/h3&gt;</a:t>
-            </a:r>
-          </a:p>
-          <a:p>
-            <a:pPr>
-              <a:defRPr sz="2000"/>
-            </a:pPr>
-            <a:r>
-              <a:t>&lt;p&gt;Age: {age}&lt;/p&gt;</a:t>
+              <a:t>They were more common before hooks, but most modern React code now uses function components.</a:t>
             </a:r>
           </a:p>
         </p:txBody>
@@ -13555,31 +13745,47 @@
               <a:defRPr sz="2000"/>
             </a:pPr>
             <a:r>
-              <a:t>&lt;/div&gt;</a:t>
-            </a:r>
-          </a:p>
-          <a:p>
-            <a:pPr>
-              <a:defRPr sz="2000"/>
-            </a:pPr>
-            <a:r>
-              <a:t>);</a:t>
-            </a:r>
-          </a:p>
-          <a:p>
-            <a:pPr>
-              <a:defRPr sz="2000"/>
-            </a:pPr>
-            <a:r>
-              <a:t>}</a:t>
-            </a:r>
-          </a:p>
-          <a:p>
-            <a:pPr>
-              <a:defRPr sz="2000"/>
-            </a:pPr>
-            <a:r>
-              <a:t>Props make components reusable because the same component can show different data.</a:t>
+              <a:t>Components can accept props to receive data from a parent component.</a:t>
+            </a:r>
+          </a:p>
+          <a:p>
+            <a:pPr>
+              <a:defRPr sz="2000"/>
+            </a:pPr>
+            <a:r>
+              <a:t>function UserCard({ name, age }) {</a:t>
+            </a:r>
+          </a:p>
+          <a:p>
+            <a:pPr>
+              <a:defRPr sz="2000"/>
+            </a:pPr>
+            <a:r>
+              <a:t>return (</a:t>
+            </a:r>
+          </a:p>
+          <a:p>
+            <a:pPr>
+              <a:defRPr sz="2000"/>
+            </a:pPr>
+            <a:r>
+              <a:t>&lt;div&gt;</a:t>
+            </a:r>
+          </a:p>
+          <a:p>
+            <a:pPr>
+              <a:defRPr sz="2000"/>
+            </a:pPr>
+            <a:r>
+              <a:t>&lt;h3&gt;{name}&lt;/h3&gt;</a:t>
+            </a:r>
+          </a:p>
+          <a:p>
+            <a:pPr>
+              <a:defRPr sz="2000"/>
+            </a:pPr>
+            <a:r>
+              <a:t>&lt;p&gt;Age: {age}&lt;/p&gt;</a:t>
             </a:r>
           </a:p>
         </p:txBody>
@@ -13741,7 +13947,7 @@
           <a:lstStyle/>
           <a:p>
             <a:r>
-              <a:t>Components with state</a:t>
+              <a:t>Components with props</a:t>
             </a:r>
           </a:p>
         </p:txBody>
@@ -13765,47 +13971,31 @@
               <a:defRPr sz="2000"/>
             </a:pPr>
             <a:r>
-              <a:t>A component can store data that changes over time using state.</a:t>
-            </a:r>
-          </a:p>
-          <a:p>
-            <a:pPr>
-              <a:defRPr sz="2000"/>
-            </a:pPr>
-            <a:r>
-              <a:t>import { useState } from "react";</a:t>
-            </a:r>
-          </a:p>
-          <a:p>
-            <a:pPr>
-              <a:defRPr sz="2000"/>
-            </a:pPr>
-            <a:r>
-              <a:t>function Counter() {</a:t>
-            </a:r>
-          </a:p>
-          <a:p>
-            <a:pPr>
-              <a:defRPr sz="2000"/>
-            </a:pPr>
-            <a:r>
-              <a:t>const [count, setCount] = useState(0);</a:t>
-            </a:r>
-          </a:p>
-          <a:p>
-            <a:pPr>
-              <a:defRPr sz="2000"/>
-            </a:pPr>
-            <a:r>
-              <a:t>return (</a:t>
-            </a:r>
-          </a:p>
-          <a:p>
-            <a:pPr>
-              <a:defRPr sz="2000"/>
-            </a:pPr>
-            <a:r>
-              <a:t>&lt;button onClick={() =&gt; setCount(count + 1)}&gt;</a:t>
+              <a:t>&lt;/div&gt;</a:t>
+            </a:r>
+          </a:p>
+          <a:p>
+            <a:pPr>
+              <a:defRPr sz="2000"/>
+            </a:pPr>
+            <a:r>
+              <a:t>);</a:t>
+            </a:r>
+          </a:p>
+          <a:p>
+            <a:pPr>
+              <a:defRPr sz="2000"/>
+            </a:pPr>
+            <a:r>
+              <a:t>}</a:t>
+            </a:r>
+          </a:p>
+          <a:p>
+            <a:pPr>
+              <a:defRPr sz="2000"/>
+            </a:pPr>
+            <a:r>
+              <a:t>Props make components reusable because the same component can show different data.</a:t>
             </a:r>
           </a:p>
         </p:txBody>
@@ -13875,39 +14065,47 @@
               <a:defRPr sz="2000"/>
             </a:pPr>
             <a:r>
-              <a:t>Count: {count}</a:t>
-            </a:r>
-          </a:p>
-          <a:p>
-            <a:pPr>
-              <a:defRPr sz="2000"/>
-            </a:pPr>
-            <a:r>
-              <a:t>&lt;/button&gt;</a:t>
-            </a:r>
-          </a:p>
-          <a:p>
-            <a:pPr>
-              <a:defRPr sz="2000"/>
-            </a:pPr>
-            <a:r>
-              <a:t>);</a:t>
-            </a:r>
-          </a:p>
-          <a:p>
-            <a:pPr>
-              <a:defRPr sz="2000"/>
-            </a:pPr>
-            <a:r>
-              <a:t>}</a:t>
-            </a:r>
-          </a:p>
-          <a:p>
-            <a:pPr>
-              <a:defRPr sz="2000"/>
-            </a:pPr>
-            <a:r>
-              <a:t>State lets components react to user actions, API data, and other changes in the app.</a:t>
+              <a:t>A component can store data that changes over time using state.</a:t>
+            </a:r>
+          </a:p>
+          <a:p>
+            <a:pPr>
+              <a:defRPr sz="2000"/>
+            </a:pPr>
+            <a:r>
+              <a:t>import { useState } from "react";</a:t>
+            </a:r>
+          </a:p>
+          <a:p>
+            <a:pPr>
+              <a:defRPr sz="2000"/>
+            </a:pPr>
+            <a:r>
+              <a:t>function Counter() {</a:t>
+            </a:r>
+          </a:p>
+          <a:p>
+            <a:pPr>
+              <a:defRPr sz="2000"/>
+            </a:pPr>
+            <a:r>
+              <a:t>const [count, setCount] = useState(0);</a:t>
+            </a:r>
+          </a:p>
+          <a:p>
+            <a:pPr>
+              <a:defRPr sz="2000"/>
+            </a:pPr>
+            <a:r>
+              <a:t>return (</a:t>
+            </a:r>
+          </a:p>
+          <a:p>
+            <a:pPr>
+              <a:defRPr sz="2000"/>
+            </a:pPr>
+            <a:r>
+              <a:t>&lt;button onClick={() =&gt; setCount(count + 1)}&gt;</a:t>
             </a:r>
           </a:p>
         </p:txBody>
@@ -13953,7 +14151,7 @@
           <a:lstStyle/>
           <a:p>
             <a:r>
-              <a:t>Why components are so important</a:t>
+              <a:t>Components with state</a:t>
             </a:r>
           </a:p>
         </p:txBody>
@@ -13977,44 +14175,39 @@
               <a:defRPr sz="2000"/>
             </a:pPr>
             <a:r>
-              <a:rPr dirty="0"/>
-              <a:t>React is built around components, so understanding them is the foundation of learning React. They are important because they support:</a:t>
-            </a:r>
-          </a:p>
-          <a:p>
-            <a:pPr lvl="1">
-              <a:defRPr sz="2000"/>
-            </a:pPr>
-            <a:r>
-              <a:rPr dirty="0"/>
-              <a:t>Reusability.</a:t>
-            </a:r>
-          </a:p>
-          <a:p>
-            <a:pPr lvl="1">
-              <a:defRPr sz="2000"/>
-            </a:pPr>
-            <a:r>
-              <a:rPr dirty="0"/>
-              <a:t>Separation of concerns.</a:t>
-            </a:r>
-          </a:p>
-          <a:p>
-            <a:pPr lvl="1">
-              <a:defRPr sz="2000"/>
-            </a:pPr>
-            <a:r>
-              <a:rPr dirty="0"/>
-              <a:t>Better maintainability.</a:t>
-            </a:r>
-          </a:p>
-          <a:p>
-            <a:pPr lvl="1">
-              <a:defRPr sz="2000"/>
-            </a:pPr>
-            <a:r>
-              <a:rPr dirty="0"/>
-              <a:t>Easier scaling for larger apps.</a:t>
+              <a:t>Count: {count}</a:t>
+            </a:r>
+          </a:p>
+          <a:p>
+            <a:pPr>
+              <a:defRPr sz="2000"/>
+            </a:pPr>
+            <a:r>
+              <a:t>&lt;/button&gt;</a:t>
+            </a:r>
+          </a:p>
+          <a:p>
+            <a:pPr>
+              <a:defRPr sz="2000"/>
+            </a:pPr>
+            <a:r>
+              <a:t>);</a:t>
+            </a:r>
+          </a:p>
+          <a:p>
+            <a:pPr>
+              <a:defRPr sz="2000"/>
+            </a:pPr>
+            <a:r>
+              <a:t>}</a:t>
+            </a:r>
+          </a:p>
+          <a:p>
+            <a:pPr>
+              <a:defRPr sz="2000"/>
+            </a:pPr>
+            <a:r>
+              <a:t>State lets components react to user actions, API data, and other changes in the app.</a:t>
             </a:r>
           </a:p>
         </p:txBody>
@@ -14060,7 +14253,7 @@
           <a:lstStyle/>
           <a:p>
             <a:r>
-              <a:t>Simple component hierarchy</a:t>
+              <a:t>Why components are so important</a:t>
             </a:r>
           </a:p>
         </p:txBody>
@@ -14084,47 +14277,44 @@
               <a:defRPr sz="2000"/>
             </a:pPr>
             <a:r>
-              <a:t>Components can be nested inside each other.</a:t>
-            </a:r>
-          </a:p>
-          <a:p>
-            <a:pPr>
-              <a:defRPr sz="2000"/>
-            </a:pPr>
-            <a:r>
-              <a:t>function App() {</a:t>
-            </a:r>
-          </a:p>
-          <a:p>
-            <a:pPr>
-              <a:defRPr sz="2000"/>
-            </a:pPr>
-            <a:r>
-              <a:t>return (</a:t>
-            </a:r>
-          </a:p>
-          <a:p>
-            <a:pPr>
-              <a:defRPr sz="2000"/>
-            </a:pPr>
-            <a:r>
-              <a:t>&lt;div&gt;</a:t>
-            </a:r>
-          </a:p>
-          <a:p>
-            <a:pPr>
-              <a:defRPr sz="2000"/>
-            </a:pPr>
-            <a:r>
-              <a:t>&lt;Header /&gt;</a:t>
-            </a:r>
-          </a:p>
-          <a:p>
-            <a:pPr>
-              <a:defRPr sz="2000"/>
-            </a:pPr>
-            <a:r>
-              <a:t>&lt;MainContent /&gt;</a:t>
+              <a:rPr dirty="0"/>
+              <a:t>React is built around components, so understanding them is the foundation of learning React. They are important because they support:</a:t>
+            </a:r>
+          </a:p>
+          <a:p>
+            <a:pPr lvl="1">
+              <a:defRPr sz="2000"/>
+            </a:pPr>
+            <a:r>
+              <a:rPr dirty="0"/>
+              <a:t>Reusability.</a:t>
+            </a:r>
+          </a:p>
+          <a:p>
+            <a:pPr lvl="1">
+              <a:defRPr sz="2000"/>
+            </a:pPr>
+            <a:r>
+              <a:rPr dirty="0"/>
+              <a:t>Separation of concerns.</a:t>
+            </a:r>
+          </a:p>
+          <a:p>
+            <a:pPr lvl="1">
+              <a:defRPr sz="2000"/>
+            </a:pPr>
+            <a:r>
+              <a:rPr dirty="0"/>
+              <a:t>Better maintainability.</a:t>
+            </a:r>
+          </a:p>
+          <a:p>
+            <a:pPr lvl="1">
+              <a:defRPr sz="2000"/>
+            </a:pPr>
+            <a:r>
+              <a:rPr dirty="0"/>
+              <a:t>Easier scaling for larger apps.</a:t>
             </a:r>
           </a:p>
         </p:txBody>
@@ -14194,39 +14384,47 @@
               <a:defRPr sz="2000"/>
             </a:pPr>
             <a:r>
-              <a:t>&lt;Footer /&gt;</a:t>
-            </a:r>
-          </a:p>
-          <a:p>
-            <a:pPr>
-              <a:defRPr sz="2000"/>
-            </a:pPr>
-            <a:r>
-              <a:t>&lt;/div&gt;</a:t>
-            </a:r>
-          </a:p>
-          <a:p>
-            <a:pPr>
-              <a:defRPr sz="2000"/>
-            </a:pPr>
-            <a:r>
-              <a:t>);</a:t>
-            </a:r>
-          </a:p>
-          <a:p>
-            <a:pPr>
-              <a:defRPr sz="2000"/>
-            </a:pPr>
-            <a:r>
-              <a:t>}</a:t>
-            </a:r>
-          </a:p>
-          <a:p>
-            <a:pPr>
-              <a:defRPr sz="2000"/>
-            </a:pPr>
-            <a:r>
-              <a:t>This structure helps you build complex interfaces from small pieces.</a:t>
+              <a:t>Components can be nested inside each other.</a:t>
+            </a:r>
+          </a:p>
+          <a:p>
+            <a:pPr>
+              <a:defRPr sz="2000"/>
+            </a:pPr>
+            <a:r>
+              <a:t>function App() {</a:t>
+            </a:r>
+          </a:p>
+          <a:p>
+            <a:pPr>
+              <a:defRPr sz="2000"/>
+            </a:pPr>
+            <a:r>
+              <a:t>return (</a:t>
+            </a:r>
+          </a:p>
+          <a:p>
+            <a:pPr>
+              <a:defRPr sz="2000"/>
+            </a:pPr>
+            <a:r>
+              <a:t>&lt;div&gt;</a:t>
+            </a:r>
+          </a:p>
+          <a:p>
+            <a:pPr>
+              <a:defRPr sz="2000"/>
+            </a:pPr>
+            <a:r>
+              <a:t>&lt;Header /&gt;</a:t>
+            </a:r>
+          </a:p>
+          <a:p>
+            <a:pPr>
+              <a:defRPr sz="2000"/>
+            </a:pPr>
+            <a:r>
+              <a:t>&lt;MainContent /&gt;</a:t>
             </a:r>
           </a:p>
         </p:txBody>
@@ -14272,7 +14470,7 @@
           <a:lstStyle/>
           <a:p>
             <a:r>
-              <a:t>React Props</a:t>
+              <a:t>Simple component hierarchy</a:t>
             </a:r>
           </a:p>
         </p:txBody>
@@ -14293,36 +14491,42 @@
           <a:lstStyle/>
           <a:p>
             <a:pPr>
-              <a:defRPr sz="2200"/>
-            </a:pPr>
-            <a:r>
-              <a:rPr dirty="0"/>
-              <a:t>Props, short for properties, are the way React components receive data from</a:t>
-            </a:r>
-            <a:r>
-              <a:rPr lang="en-US" dirty="0"/>
-              <a:t> </a:t>
-            </a:r>
-            <a:r>
-              <a:rPr dirty="0"/>
-              <a:t>their parent component. </a:t>
-            </a:r>
-            <a:endParaRPr lang="en-US" dirty="0"/>
-          </a:p>
-          <a:p>
-            <a:pPr>
-              <a:defRPr sz="2200"/>
-            </a:pPr>
-            <a:r>
-              <a:rPr dirty="0"/>
-              <a:t>They are one of the most important ideas in React</a:t>
-            </a:r>
-            <a:br>
-              <a:rPr dirty="0"/>
-            </a:br>
-            <a:r>
-              <a:rPr dirty="0"/>
-              <a:t>because they make components reusable and customizable.</a:t>
+              <a:defRPr sz="2000"/>
+            </a:pPr>
+            <a:r>
+              <a:t>&lt;Footer /&gt;</a:t>
+            </a:r>
+          </a:p>
+          <a:p>
+            <a:pPr>
+              <a:defRPr sz="2000"/>
+            </a:pPr>
+            <a:r>
+              <a:t>&lt;/div&gt;</a:t>
+            </a:r>
+          </a:p>
+          <a:p>
+            <a:pPr>
+              <a:defRPr sz="2000"/>
+            </a:pPr>
+            <a:r>
+              <a:t>);</a:t>
+            </a:r>
+          </a:p>
+          <a:p>
+            <a:pPr>
+              <a:defRPr sz="2000"/>
+            </a:pPr>
+            <a:r>
+              <a:t>}</a:t>
+            </a:r>
+          </a:p>
+          <a:p>
+            <a:pPr>
+              <a:defRPr sz="2000"/>
+            </a:pPr>
+            <a:r>
+              <a:t>This structure helps you build complex interfaces from small pieces.</a:t>
             </a:r>
           </a:p>
         </p:txBody>
@@ -14368,7 +14572,7 @@
           <a:lstStyle/>
           <a:p>
             <a:r>
-              <a:t>What props are</a:t>
+              <a:t>React Props</a:t>
             </a:r>
           </a:p>
         </p:txBody>
@@ -14393,7 +14597,7 @@
             </a:pPr>
             <a:r>
               <a:rPr dirty="0"/>
-              <a:t>Think of props like function arguments in JavaScript. A parent component passes</a:t>
+              <a:t>Props, short for properties, are the way React components receive data from</a:t>
             </a:r>
             <a:r>
               <a:rPr lang="en-US" dirty="0"/>
@@ -14401,16 +14605,9 @@
             </a:r>
             <a:r>
               <a:rPr dirty="0"/>
-              <a:t>values into a child component, and the child uses those values to display UI or</a:t>
-            </a:r>
-            <a:r>
-              <a:rPr lang="en-US" dirty="0"/>
-              <a:t> </a:t>
-            </a:r>
-            <a:r>
-              <a:rPr dirty="0"/>
-              <a:t>control behavior.</a:t>
-            </a:r>
+              <a:t>their parent component. </a:t>
+            </a:r>
+            <a:endParaRPr lang="en-US" dirty="0"/>
           </a:p>
           <a:p>
             <a:pPr>
@@ -14418,16 +14615,14 @@
             </a:pPr>
             <a:r>
               <a:rPr dirty="0"/>
-              <a:t>function Greeting(props) {</a:t>
-            </a:r>
-          </a:p>
-          <a:p>
-            <a:pPr>
-              <a:defRPr sz="2200"/>
-            </a:pPr>
-            <a:r>
-              <a:rPr dirty="0"/>
-              <a:t>return &lt;h1&gt;Hello, {props.name}&lt;/h1&gt;;</a:t>
+              <a:t>They are one of the most important ideas in React</a:t>
+            </a:r>
+            <a:br>
+              <a:rPr dirty="0"/>
+            </a:br>
+            <a:r>
+              <a:rPr dirty="0"/>
+              <a:t>because they make components reusable and customizable.</a:t>
             </a:r>
           </a:p>
         </p:txBody>
@@ -14473,7 +14668,7 @@
           <a:lstStyle/>
           <a:p>
             <a:r>
-              <a:t>Props help you:</a:t>
+              <a:t>What props are</a:t>
             </a:r>
           </a:p>
         </p:txBody>
@@ -14498,43 +14693,7 @@
             </a:pPr>
             <a:r>
               <a:rPr dirty="0"/>
-              <a:t>Reuse the same component with different data.</a:t>
-            </a:r>
-          </a:p>
-          <a:p>
-            <a:pPr>
-              <a:defRPr sz="2200"/>
-            </a:pPr>
-            <a:r>
-              <a:rPr dirty="0"/>
-              <a:t>Keep components flexible.</a:t>
-            </a:r>
-          </a:p>
-          <a:p>
-            <a:pPr>
-              <a:defRPr sz="2200"/>
-            </a:pPr>
-            <a:r>
-              <a:rPr dirty="0"/>
-              <a:t>Pass data from parent to child.</a:t>
-            </a:r>
-          </a:p>
-          <a:p>
-            <a:pPr>
-              <a:defRPr sz="2200"/>
-            </a:pPr>
-            <a:r>
-              <a:rPr dirty="0"/>
-              <a:t>Build dynamic UIs instead of hardcoding text.</a:t>
-            </a:r>
-          </a:p>
-          <a:p>
-            <a:pPr>
-              <a:defRPr sz="2200"/>
-            </a:pPr>
-            <a:r>
-              <a:rPr dirty="0"/>
-              <a:t>Without props, you would need separate components for every variation of a UI</a:t>
+              <a:t>Think of props like function arguments in JavaScript. A parent component passes</a:t>
             </a:r>
             <a:r>
               <a:rPr lang="en-US" dirty="0"/>
@@ -14542,7 +14701,33 @@
             </a:r>
             <a:r>
               <a:rPr dirty="0"/>
-              <a:t>element.</a:t>
+              <a:t>values into a child component, and the child uses those values to display UI or</a:t>
+            </a:r>
+            <a:r>
+              <a:rPr lang="en-US" dirty="0"/>
+              <a:t> </a:t>
+            </a:r>
+            <a:r>
+              <a:rPr dirty="0"/>
+              <a:t>control behavior.</a:t>
+            </a:r>
+          </a:p>
+          <a:p>
+            <a:pPr>
+              <a:defRPr sz="2200"/>
+            </a:pPr>
+            <a:r>
+              <a:rPr dirty="0"/>
+              <a:t>function Greeting(props) {</a:t>
+            </a:r>
+          </a:p>
+          <a:p>
+            <a:pPr>
+              <a:defRPr sz="2200"/>
+            </a:pPr>
+            <a:r>
+              <a:rPr dirty="0"/>
+              <a:t>return &lt;h1&gt;Hello, {props.name}&lt;/h1&gt;;</a:t>
             </a:r>
           </a:p>
         </p:txBody>
@@ -14588,7 +14773,7 @@
           <a:lstStyle/>
           <a:p>
             <a:r>
-              <a:t>How props are passed</a:t>
+              <a:t>Props help you:</a:t>
             </a:r>
           </a:p>
         </p:txBody>
@@ -14612,7 +14797,8 @@
               <a:defRPr sz="2200"/>
             </a:pPr>
             <a:r>
-              <a:t>Props are passed when you use a component, just like HTML attributes.</a:t>
+              <a:rPr dirty="0"/>
+              <a:t>Reuse the same component with different data.</a:t>
             </a:r>
           </a:p>
           <a:p>
@@ -14620,7 +14806,8 @@
               <a:defRPr sz="2200"/>
             </a:pPr>
             <a:r>
-              <a:t>function UserCard(props) {</a:t>
+              <a:rPr dirty="0"/>
+              <a:t>Keep components flexible.</a:t>
             </a:r>
           </a:p>
           <a:p>
@@ -14628,7 +14815,34 @@
               <a:defRPr sz="2200"/>
             </a:pPr>
             <a:r>
-              <a:t>return &lt;p&gt;{props.name} is {props.age} years old.&lt;/p&gt;;</a:t>
+              <a:rPr dirty="0"/>
+              <a:t>Pass data from parent to child.</a:t>
+            </a:r>
+          </a:p>
+          <a:p>
+            <a:pPr>
+              <a:defRPr sz="2200"/>
+            </a:pPr>
+            <a:r>
+              <a:rPr dirty="0"/>
+              <a:t>Build dynamic UIs instead of hardcoding text.</a:t>
+            </a:r>
+          </a:p>
+          <a:p>
+            <a:pPr>
+              <a:defRPr sz="2200"/>
+            </a:pPr>
+            <a:r>
+              <a:rPr dirty="0"/>
+              <a:t>Without props, you would need separate components for every variation of a UI</a:t>
+            </a:r>
+            <a:r>
+              <a:rPr lang="en-US" dirty="0"/>
+              <a:t> </a:t>
+            </a:r>
+            <a:r>
+              <a:rPr dirty="0"/>
+              <a:t>element.</a:t>
             </a:r>
           </a:p>
         </p:txBody>
@@ -14673,7 +14887,9 @@
           <a:bodyPr/>
           <a:lstStyle/>
           <a:p>
-            <a:endParaRPr dirty="0"/>
+            <a:r>
+              <a:t>How props are passed</a:t>
+            </a:r>
           </a:p>
         </p:txBody>
       </p:sp>
@@ -14696,8 +14912,7 @@
               <a:defRPr sz="2200"/>
             </a:pPr>
             <a:r>
-              <a:rPr dirty="0"/>
-              <a:t>function App() {</a:t>
+              <a:t>Props are passed when you use a component, just like HTML attributes.</a:t>
             </a:r>
           </a:p>
           <a:p>
@@ -14705,28 +14920,16 @@
               <a:defRPr sz="2200"/>
             </a:pPr>
             <a:r>
-              <a:rPr dirty="0"/>
-              <a:t>return &lt;</a:t>
-            </a:r>
-            <a:r>
-              <a:rPr dirty="0" err="1"/>
-              <a:t>UserCard</a:t>
-            </a:r>
-            <a:r>
-              <a:rPr dirty="0"/>
-              <a:t> name="Riya" age={22} /&gt;;</a:t>
-            </a:r>
-            <a:endParaRPr lang="en-US" dirty="0"/>
+              <a:t>function UserCard(props) {</a:t>
+            </a:r>
           </a:p>
           <a:p>
             <a:pPr>
               <a:defRPr sz="2200"/>
             </a:pPr>
             <a:r>
-              <a:rPr lang="en-IN" dirty="0"/>
-              <a:t>}</a:t>
-            </a:r>
-            <a:endParaRPr dirty="0"/>
+              <a:t>return &lt;p&gt;{props.name} is {props.age} years old.&lt;/p&gt;;</a:t>
+            </a:r>
           </a:p>
         </p:txBody>
       </p:sp>
@@ -14874,16 +15077,36 @@
             </a:pPr>
             <a:r>
               <a:rPr dirty="0"/>
-              <a:t>Inside the component, React gives you one props object containing all the</a:t>
-            </a:r>
-            <a:r>
-              <a:rPr lang="en-US" dirty="0"/>
-              <a:t> </a:t>
-            </a:r>
-            <a:r>
-              <a:rPr dirty="0"/>
-              <a:t>values.</a:t>
-            </a:r>
+              <a:t>function App() {</a:t>
+            </a:r>
+          </a:p>
+          <a:p>
+            <a:pPr>
+              <a:defRPr sz="2200"/>
+            </a:pPr>
+            <a:r>
+              <a:rPr dirty="0"/>
+              <a:t>return &lt;</a:t>
+            </a:r>
+            <a:r>
+              <a:rPr dirty="0" err="1"/>
+              <a:t>UserCard</a:t>
+            </a:r>
+            <a:r>
+              <a:rPr dirty="0"/>
+              <a:t> name="Riya" age={22} /&gt;;</a:t>
+            </a:r>
+            <a:endParaRPr lang="en-US" dirty="0"/>
+          </a:p>
+          <a:p>
+            <a:pPr>
+              <a:defRPr sz="2200"/>
+            </a:pPr>
+            <a:r>
+              <a:rPr lang="en-IN" dirty="0"/>
+              <a:t>}</a:t>
+            </a:r>
+            <a:endParaRPr dirty="0"/>
           </a:p>
         </p:txBody>
       </p:sp>
@@ -14927,9 +15150,7 @@
           <a:bodyPr/>
           <a:lstStyle/>
           <a:p>
-            <a:r>
-              <a:t>Destructuring props</a:t>
-            </a:r>
+            <a:endParaRPr dirty="0"/>
           </a:p>
         </p:txBody>
       </p:sp>
@@ -14952,23 +15173,16 @@
               <a:defRPr sz="2200"/>
             </a:pPr>
             <a:r>
-              <a:t>A cleaner way is to destructure props directly in the function parameter.</a:t>
-            </a:r>
-          </a:p>
-          <a:p>
-            <a:pPr>
-              <a:defRPr sz="2200"/>
-            </a:pPr>
-            <a:r>
-              <a:t>function UserCard({ name, age }) {</a:t>
-            </a:r>
-          </a:p>
-          <a:p>
-            <a:pPr>
-              <a:defRPr sz="2200"/>
-            </a:pPr>
-            <a:r>
-              <a:t>return &lt;p&gt;{name} is {age} years old.&lt;/p&gt;;</a:t>
+              <a:rPr dirty="0"/>
+              <a:t>Inside the component, React gives you one props object containing all the</a:t>
+            </a:r>
+            <a:r>
+              <a:rPr lang="en-US" dirty="0"/>
+              <a:t> </a:t>
+            </a:r>
+            <a:r>
+              <a:rPr dirty="0"/>
+              <a:t>values.</a:t>
             </a:r>
           </a:p>
         </p:txBody>
@@ -15014,7 +15228,7 @@
           <a:lstStyle/>
           <a:p>
             <a:r>
-              <a:t>Props can pass many kinds of data:</a:t>
+              <a:t>Destructuring props</a:t>
             </a:r>
           </a:p>
         </p:txBody>
@@ -15038,7 +15252,7 @@
               <a:defRPr sz="2200"/>
             </a:pPr>
             <a:r>
-              <a:t>Strings.</a:t>
+              <a:t>A cleaner way is to destructure props directly in the function parameter.</a:t>
             </a:r>
           </a:p>
           <a:p>
@@ -15046,7 +15260,7 @@
               <a:defRPr sz="2200"/>
             </a:pPr>
             <a:r>
-              <a:t>Numbers.</a:t>
+              <a:t>function UserCard({ name, age }) {</a:t>
             </a:r>
           </a:p>
           <a:p>
@@ -15054,31 +15268,7 @@
               <a:defRPr sz="2200"/>
             </a:pPr>
             <a:r>
-              <a:t>Booleans.</a:t>
-            </a:r>
-          </a:p>
-          <a:p>
-            <a:pPr>
-              <a:defRPr sz="2200"/>
-            </a:pPr>
-            <a:r>
-              <a:t>Arrays.</a:t>
-            </a:r>
-          </a:p>
-          <a:p>
-            <a:pPr>
-              <a:defRPr sz="2200"/>
-            </a:pPr>
-            <a:r>
-              <a:t>Objects.</a:t>
-            </a:r>
-          </a:p>
-          <a:p>
-            <a:pPr>
-              <a:defRPr sz="2200"/>
-            </a:pPr>
-            <a:r>
-              <a:t>Functions.</a:t>
+              <a:t>return &lt;p&gt;{name} is {age} years old.&lt;/p&gt;;</a:t>
             </a:r>
           </a:p>
         </p:txBody>
@@ -15124,7 +15314,7 @@
           <a:lstStyle/>
           <a:p>
             <a:r>
-              <a:t>Props can pass many kinds of data: (cont.)</a:t>
+              <a:t>Props can pass many kinds of data:</a:t>
             </a:r>
           </a:p>
         </p:txBody>
@@ -15148,7 +15338,47 @@
               <a:defRPr sz="2200"/>
             </a:pPr>
             <a:r>
-              <a:t>JSX / children.</a:t>
+              <a:t>Strings.</a:t>
+            </a:r>
+          </a:p>
+          <a:p>
+            <a:pPr>
+              <a:defRPr sz="2200"/>
+            </a:pPr>
+            <a:r>
+              <a:t>Numbers.</a:t>
+            </a:r>
+          </a:p>
+          <a:p>
+            <a:pPr>
+              <a:defRPr sz="2200"/>
+            </a:pPr>
+            <a:r>
+              <a:t>Booleans.</a:t>
+            </a:r>
+          </a:p>
+          <a:p>
+            <a:pPr>
+              <a:defRPr sz="2200"/>
+            </a:pPr>
+            <a:r>
+              <a:t>Arrays.</a:t>
+            </a:r>
+          </a:p>
+          <a:p>
+            <a:pPr>
+              <a:defRPr sz="2200"/>
+            </a:pPr>
+            <a:r>
+              <a:t>Objects.</a:t>
+            </a:r>
+          </a:p>
+          <a:p>
+            <a:pPr>
+              <a:defRPr sz="2200"/>
+            </a:pPr>
+            <a:r>
+              <a:t>Functions.</a:t>
             </a:r>
           </a:p>
         </p:txBody>
@@ -15194,7 +15424,7 @@
           <a:lstStyle/>
           <a:p>
             <a:r>
-              <a:t>Read-only nature of props</a:t>
+              <a:t>Props can pass many kinds of data: (cont.)</a:t>
             </a:r>
           </a:p>
         </p:txBody>
@@ -15218,19 +15448,7 @@
               <a:defRPr sz="2200"/>
             </a:pPr>
             <a:r>
-              <a:t>Props are read-only. A child component should not change the props it receives.</a:t>
-            </a:r>
-            <a:br/>
-            <a:r>
-              <a:t>If data needs to change, the change should happen in the parent or in state.</a:t>
-            </a:r>
-          </a:p>
-          <a:p>
-            <a:pPr>
-              <a:defRPr sz="2200"/>
-            </a:pPr>
-            <a:r>
-              <a:t>function UserCard({ name }) {</a:t>
+              <a:t>JSX / children.</a:t>
             </a:r>
           </a:p>
         </p:txBody>
@@ -15276,7 +15494,7 @@
           <a:lstStyle/>
           <a:p>
             <a:r>
-              <a:t>props.children</a:t>
+              <a:t>Read-only nature of props</a:t>
             </a:r>
           </a:p>
         </p:txBody>
@@ -15300,7 +15518,11 @@
               <a:defRPr sz="2200"/>
             </a:pPr>
             <a:r>
-              <a:t>children is a special prop that lets you pass content inside a component.</a:t>
+              <a:t>Props are read-only. A child component should not change the props it receives.</a:t>
+            </a:r>
+            <a:br/>
+            <a:r>
+              <a:t>If data needs to change, the change should happen in the parent or in state.</a:t>
             </a:r>
           </a:p>
           <a:p>
@@ -15308,15 +15530,7 @@
               <a:defRPr sz="2200"/>
             </a:pPr>
             <a:r>
-              <a:t>function Box({ children }) {</a:t>
-            </a:r>
-          </a:p>
-          <a:p>
-            <a:pPr>
-              <a:defRPr sz="2200"/>
-            </a:pPr>
-            <a:r>
-              <a:t>return &lt;div&gt;{children}&lt;/div&gt;;</a:t>
+              <a:t>function UserCard({ name }) {</a:t>
             </a:r>
           </a:p>
         </p:txBody>
@@ -15362,10 +15576,8 @@
           <a:lstStyle/>
           <a:p>
             <a:r>
-              <a:rPr lang="en-US" dirty="0"/>
-              <a:t> </a:t>
-            </a:r>
-            <a:endParaRPr dirty="0"/>
+              <a:t>props.children</a:t>
+            </a:r>
           </a:p>
         </p:txBody>
       </p:sp>
@@ -15388,7 +15600,7 @@
               <a:defRPr sz="2200"/>
             </a:pPr>
             <a:r>
-              <a:t>function App() {</a:t>
+              <a:t>children is a special prop that lets you pass content inside a component.</a:t>
             </a:r>
           </a:p>
           <a:p>
@@ -15396,7 +15608,7 @@
               <a:defRPr sz="2200"/>
             </a:pPr>
             <a:r>
-              <a:t>return (</a:t>
+              <a:t>function Box({ children }) {</a:t>
             </a:r>
           </a:p>
           <a:p>
@@ -15404,31 +15616,7 @@
               <a:defRPr sz="2200"/>
             </a:pPr>
             <a:r>
-              <a:t>&lt;Box&gt;</a:t>
-            </a:r>
-          </a:p>
-          <a:p>
-            <a:pPr>
-              <a:defRPr sz="2200"/>
-            </a:pPr>
-            <a:r>
-              <a:t>&lt;h1&gt;Hello&lt;/h1&gt;</a:t>
-            </a:r>
-          </a:p>
-          <a:p>
-            <a:pPr>
-              <a:defRPr sz="2200"/>
-            </a:pPr>
-            <a:r>
-              <a:t>&lt;p&gt;This is inside Box&lt;/p&gt;</a:t>
-            </a:r>
-          </a:p>
-          <a:p>
-            <a:pPr>
-              <a:defRPr sz="2200"/>
-            </a:pPr>
-            <a:r>
-              <a:t>&lt;/Box&gt;</a:t>
+              <a:t>return &lt;div&gt;{children}&lt;/div&gt;;</a:t>
             </a:r>
           </a:p>
         </p:txBody>
@@ -15473,6 +15661,10 @@
           <a:bodyPr/>
           <a:lstStyle/>
           <a:p>
+            <a:r>
+              <a:rPr lang="en-US" dirty="0"/>
+              <a:t> </a:t>
+            </a:r>
             <a:endParaRPr dirty="0"/>
           </a:p>
         </p:txBody>
@@ -15496,7 +15688,47 @@
               <a:defRPr sz="2200"/>
             </a:pPr>
             <a:r>
-              <a:t>This is useful for layout and wrapper components.</a:t>
+              <a:t>function App() {</a:t>
+            </a:r>
+          </a:p>
+          <a:p>
+            <a:pPr>
+              <a:defRPr sz="2200"/>
+            </a:pPr>
+            <a:r>
+              <a:t>return (</a:t>
+            </a:r>
+          </a:p>
+          <a:p>
+            <a:pPr>
+              <a:defRPr sz="2200"/>
+            </a:pPr>
+            <a:r>
+              <a:t>&lt;Box&gt;</a:t>
+            </a:r>
+          </a:p>
+          <a:p>
+            <a:pPr>
+              <a:defRPr sz="2200"/>
+            </a:pPr>
+            <a:r>
+              <a:t>&lt;h1&gt;Hello&lt;/h1&gt;</a:t>
+            </a:r>
+          </a:p>
+          <a:p>
+            <a:pPr>
+              <a:defRPr sz="2200"/>
+            </a:pPr>
+            <a:r>
+              <a:t>&lt;p&gt;This is inside Box&lt;/p&gt;</a:t>
+            </a:r>
+          </a:p>
+          <a:p>
+            <a:pPr>
+              <a:defRPr sz="2200"/>
+            </a:pPr>
+            <a:r>
+              <a:t>&lt;/Box&gt;</a:t>
             </a:r>
           </a:p>
         </p:txBody>
@@ -15541,9 +15773,7 @@
           <a:bodyPr/>
           <a:lstStyle/>
           <a:p>
-            <a:r>
-              <a:t>Default props / fallback values</a:t>
-            </a:r>
+            <a:endParaRPr dirty="0"/>
           </a:p>
         </p:txBody>
       </p:sp>
@@ -15566,23 +15796,7 @@
               <a:defRPr sz="2200"/>
             </a:pPr>
             <a:r>
-              <a:t>If a prop is missing, you can provide a default value.</a:t>
-            </a:r>
-          </a:p>
-          <a:p>
-            <a:pPr>
-              <a:defRPr sz="2200"/>
-            </a:pPr>
-            <a:r>
-              <a:t>function Greeting({ name = "Guest" }) {</a:t>
-            </a:r>
-          </a:p>
-          <a:p>
-            <a:pPr>
-              <a:defRPr sz="2200"/>
-            </a:pPr>
-            <a:r>
-              <a:t>return &lt;h1&gt;Hello, {name}&lt;/h1&gt;;</a:t>
+              <a:t>This is useful for layout and wrapper components.</a:t>
             </a:r>
           </a:p>
         </p:txBody>
@@ -15627,7 +15841,9 @@
           <a:bodyPr/>
           <a:lstStyle/>
           <a:p>
-            <a:endParaRPr dirty="0"/>
+            <a:r>
+              <a:t>Default props / fallback values</a:t>
+            </a:r>
           </a:p>
         </p:txBody>
       </p:sp>
@@ -15650,7 +15866,23 @@
               <a:defRPr sz="2200"/>
             </a:pPr>
             <a:r>
-              <a:t>This avoids showing undefined in the UI.</a:t>
+              <a:t>If a prop is missing, you can provide a default value.</a:t>
+            </a:r>
+          </a:p>
+          <a:p>
+            <a:pPr>
+              <a:defRPr sz="2200"/>
+            </a:pPr>
+            <a:r>
+              <a:t>function Greeting({ name = "Guest" }) {</a:t>
+            </a:r>
+          </a:p>
+          <a:p>
+            <a:pPr>
+              <a:defRPr sz="2200"/>
+            </a:pPr>
+            <a:r>
+              <a:t>return &lt;h1&gt;Hello, {name}&lt;/h1&gt;;</a:t>
             </a:r>
           </a:p>
         </p:txBody>
@@ -15793,9 +16025,7 @@
           <a:bodyPr/>
           <a:lstStyle/>
           <a:p>
-            <a:r>
-              <a:t>Props vs state</a:t>
-            </a:r>
+            <a:endParaRPr dirty="0"/>
           </a:p>
         </p:txBody>
       </p:sp>
@@ -15818,15 +16048,7 @@
               <a:defRPr sz="2200"/>
             </a:pPr>
             <a:r>
-              <a:t>Props come from outside the component and are read-only.</a:t>
-            </a:r>
-          </a:p>
-          <a:p>
-            <a:pPr>
-              <a:defRPr sz="2200"/>
-            </a:pPr>
-            <a:r>
-              <a:t>State belongs to the component and can change over time.</a:t>
+              <a:t>This avoids showing undefined in the UI.</a:t>
             </a:r>
           </a:p>
         </p:txBody>
@@ -15872,7 +16094,7 @@
           <a:lstStyle/>
           <a:p>
             <a:r>
-              <a:t>Simple way to remember:</a:t>
+              <a:t>Props vs state</a:t>
             </a:r>
           </a:p>
         </p:txBody>
@@ -15896,7 +16118,7 @@
               <a:defRPr sz="2200"/>
             </a:pPr>
             <a:r>
-              <a:t>Props = inputs.</a:t>
+              <a:t>Props come from outside the component and are read-only.</a:t>
             </a:r>
           </a:p>
           <a:p>
@@ -15904,7 +16126,7 @@
               <a:defRPr sz="2200"/>
             </a:pPr>
             <a:r>
-              <a:t>State = internal memory.</a:t>
+              <a:t>State belongs to the component and can change over time.</a:t>
             </a:r>
           </a:p>
         </p:txBody>
@@ -15950,7 +16172,7 @@
           <a:lstStyle/>
           <a:p>
             <a:r>
-              <a:t>Why props matter so much</a:t>
+              <a:t>Simple way to remember:</a:t>
             </a:r>
           </a:p>
         </p:txBody>
@@ -15974,15 +16196,15 @@
               <a:defRPr sz="2200"/>
             </a:pPr>
             <a:r>
-              <a:t>Props are the foundation of component communication in React. They let you build</a:t>
-            </a:r>
-            <a:br/>
-            <a:r>
-              <a:t>small reusable pieces and connect them together cleanly, which is why almost</a:t>
-            </a:r>
-            <a:br/>
-            <a:r>
-              <a:t>every React app uses them heavily.</a:t>
+              <a:t>Props = inputs.</a:t>
+            </a:r>
+          </a:p>
+          <a:p>
+            <a:pPr>
+              <a:defRPr sz="2200"/>
+            </a:pPr>
+            <a:r>
+              <a:t>State = internal memory.</a:t>
             </a:r>
           </a:p>
         </p:txBody>
@@ -16028,7 +16250,7 @@
           <a:lstStyle/>
           <a:p>
             <a:r>
-              <a:t>React State</a:t>
+              <a:t>Why props matter so much</a:t>
             </a:r>
           </a:p>
         </p:txBody>
@@ -16052,11 +16274,15 @@
               <a:defRPr sz="2200"/>
             </a:pPr>
             <a:r>
-              <a:t>State is the memory of a component. It is data that can change over time and</a:t>
+              <a:t>Props are the foundation of component communication in React. They let you build</a:t>
             </a:r>
             <a:br/>
             <a:r>
-              <a:t>cause the UI to update automatically when it changes.</a:t>
+              <a:t>small reusable pieces and connect them together cleanly, which is why almost</a:t>
+            </a:r>
+            <a:br/>
+            <a:r>
+              <a:t>every React app uses them heavily.</a:t>
             </a:r>
           </a:p>
         </p:txBody>
@@ -16102,7 +16328,7 @@
           <a:lstStyle/>
           <a:p>
             <a:r>
-              <a:t>What state is</a:t>
+              <a:t>React State</a:t>
             </a:r>
           </a:p>
         </p:txBody>
@@ -16126,47 +16352,24 @@
               <a:defRPr sz="2200"/>
             </a:pPr>
             <a:r>
-              <a:t>State is used to store values that belong to a component, such as:</a:t>
-            </a:r>
-          </a:p>
-          <a:p>
-            <a:pPr>
-              <a:defRPr sz="2200"/>
-            </a:pPr>
-            <a:r>
-              <a:t>Counter values.</a:t>
-            </a:r>
-          </a:p>
-          <a:p>
-            <a:pPr>
-              <a:defRPr sz="2200"/>
-            </a:pPr>
-            <a:r>
-              <a:t>Input text.</a:t>
-            </a:r>
-          </a:p>
-          <a:p>
-            <a:pPr>
-              <a:defRPr sz="2200"/>
-            </a:pPr>
-            <a:r>
-              <a:t>Toggle on/off values.</a:t>
-            </a:r>
-          </a:p>
-          <a:p>
-            <a:pPr>
-              <a:defRPr sz="2200"/>
-            </a:pPr>
-            <a:r>
-              <a:t>Fetched data.</a:t>
-            </a:r>
-          </a:p>
-          <a:p>
-            <a:pPr>
-              <a:defRPr sz="2200"/>
-            </a:pPr>
-            <a:r>
-              <a:t>Selected items.</a:t>
+              <a:rPr dirty="0"/>
+              <a:t>State is the </a:t>
+            </a:r>
+            <a:r>
+              <a:rPr lang="en-IN" u="sng" dirty="0"/>
+              <a:t>memory of a component</a:t>
+            </a:r>
+            <a:r>
+              <a:rPr dirty="0"/>
+              <a:t>. It is data that can change over time and</a:t>
+            </a:r>
+            <a:r>
+              <a:rPr lang="en-US" dirty="0"/>
+              <a:t> </a:t>
+            </a:r>
+            <a:r>
+              <a:rPr dirty="0"/>
+              <a:t>cause the UI to update automatically when it changes.</a:t>
             </a:r>
           </a:p>
         </p:txBody>
@@ -16212,7 +16415,8 @@
           <a:lstStyle/>
           <a:p>
             <a:r>
-              <a:t>What state is (cont.)</a:t>
+              <a:rPr dirty="0"/>
+              <a:t>What state is</a:t>
             </a:r>
           </a:p>
         </p:txBody>
@@ -16236,11 +16440,53 @@
               <a:defRPr sz="2200"/>
             </a:pPr>
             <a:r>
-              <a:t>Unlike regular variables, state is tied to React’s rendering process, so when</a:t>
-            </a:r>
-            <a:br/>
-            <a:r>
-              <a:t>state changes, the component re-renders.</a:t>
+              <a:rPr dirty="0"/>
+              <a:t>State is used to store values that belong to a component, such as:</a:t>
+            </a:r>
+          </a:p>
+          <a:p>
+            <a:pPr>
+              <a:defRPr sz="2200"/>
+            </a:pPr>
+            <a:r>
+              <a:rPr dirty="0"/>
+              <a:t>Counter values.</a:t>
+            </a:r>
+          </a:p>
+          <a:p>
+            <a:pPr>
+              <a:defRPr sz="2200"/>
+            </a:pPr>
+            <a:r>
+              <a:rPr dirty="0"/>
+              <a:t>Input text.</a:t>
+            </a:r>
+          </a:p>
+          <a:p>
+            <a:pPr>
+              <a:defRPr sz="2200"/>
+            </a:pPr>
+            <a:r>
+              <a:rPr dirty="0"/>
+              <a:t>Toggle on/off values.</a:t>
+            </a:r>
+          </a:p>
+          <a:p>
+            <a:pPr>
+              <a:defRPr sz="2200"/>
+            </a:pPr>
+            <a:r>
+              <a:rPr dirty="0"/>
+              <a:t>Fetched data.</a:t>
+            </a:r>
+          </a:p>
+          <a:p>
+            <a:pPr>
+              <a:defRPr sz="2200"/>
+            </a:pPr>
+            <a:r>
+              <a:rPr dirty="0"/>
+              <a:t>Selected items.</a:t>
             </a:r>
           </a:p>
         </p:txBody>
@@ -16286,7 +16532,7 @@
           <a:lstStyle/>
           <a:p>
             <a:r>
-              <a:t>Why state is needed</a:t>
+              <a:t>What state is (cont.)</a:t>
             </a:r>
           </a:p>
         </p:txBody>
@@ -16310,16 +16556,11 @@
               <a:defRPr sz="2200"/>
             </a:pPr>
             <a:r>
-              <a:rPr dirty="0"/>
-              <a:t>Without state, the UI would not reliably reflect changing data. State lets React</a:t>
-            </a:r>
-            <a:r>
-              <a:rPr lang="en-US" dirty="0"/>
-              <a:t> </a:t>
-            </a:r>
-            <a:r>
-              <a:rPr dirty="0"/>
-              <a:t>keep the screen in sync with user actions and other updates.</a:t>
+              <a:t>Unlike regular variables, state is tied to React’s rendering process, so when</a:t>
+            </a:r>
+            <a:br/>
+            <a:r>
+              <a:t>state changes, the component re-renders.</a:t>
             </a:r>
           </a:p>
         </p:txBody>
@@ -16365,7 +16606,7 @@
           <a:lstStyle/>
           <a:p>
             <a:r>
-              <a:t>For example:</a:t>
+              <a:t>Why state is needed</a:t>
             </a:r>
           </a:p>
         </p:txBody>
@@ -16389,31 +16630,16 @@
               <a:defRPr sz="2200"/>
             </a:pPr>
             <a:r>
-              <a:t>Clicking a button increments a count.</a:t>
-            </a:r>
-          </a:p>
-          <a:p>
-            <a:pPr>
-              <a:defRPr sz="2200"/>
-            </a:pPr>
-            <a:r>
-              <a:t>Typing into a form updates the input field.</a:t>
-            </a:r>
-          </a:p>
-          <a:p>
-            <a:pPr>
-              <a:defRPr sz="2200"/>
-            </a:pPr>
-            <a:r>
-              <a:t>Opening a modal changes its visibility.</a:t>
-            </a:r>
-          </a:p>
-          <a:p>
-            <a:pPr>
-              <a:defRPr sz="2200"/>
-            </a:pPr>
-            <a:r>
-              <a:t>Loading data updates, the page once the response arrives.</a:t>
+              <a:rPr dirty="0"/>
+              <a:t>Without state, the UI would not reliably reflect changing data. State lets React</a:t>
+            </a:r>
+            <a:r>
+              <a:rPr lang="en-US" dirty="0"/>
+              <a:t> </a:t>
+            </a:r>
+            <a:r>
+              <a:rPr dirty="0"/>
+              <a:t>keep the screen in sync with user actions and other updates.</a:t>
             </a:r>
           </a:p>
         </p:txBody>
@@ -16459,7 +16685,7 @@
           <a:lstStyle/>
           <a:p>
             <a:r>
-              <a:t>State vs regular variables</a:t>
+              <a:t>For example:</a:t>
             </a:r>
           </a:p>
         </p:txBody>
@@ -16483,11 +16709,7 @@
               <a:defRPr sz="2200"/>
             </a:pPr>
             <a:r>
-              <a:t>A normal JavaScript variable does not trigger a re-render when changed. State</a:t>
-            </a:r>
-            <a:br/>
-            <a:r>
-              <a:t>does. That is the main difference.</a:t>
+              <a:t>Clicking a button increments a count.</a:t>
             </a:r>
           </a:p>
           <a:p>
@@ -16495,7 +16717,7 @@
               <a:defRPr sz="2200"/>
             </a:pPr>
             <a:r>
-              <a:t>import { useState } from "react";</a:t>
+              <a:t>Typing into a form updates the input field.</a:t>
             </a:r>
           </a:p>
           <a:p>
@@ -16503,7 +16725,7 @@
               <a:defRPr sz="2200"/>
             </a:pPr>
             <a:r>
-              <a:t>function Counter() {</a:t>
+              <a:t>Opening a modal changes its visibility.</a:t>
             </a:r>
           </a:p>
           <a:p>
@@ -16511,15 +16733,7 @@
               <a:defRPr sz="2200"/>
             </a:pPr>
             <a:r>
-              <a:t>const [count, setCount] = useState(0);</a:t>
-            </a:r>
-          </a:p>
-          <a:p>
-            <a:pPr>
-              <a:defRPr sz="2200"/>
-            </a:pPr>
-            <a:r>
-              <a:t>return &lt;button onClick={() =&gt; setCount(count + 1)}&gt;{count}&lt;/button&gt;;</a:t>
+              <a:t>Loading data updates, the page once the response arrives.</a:t>
             </a:r>
           </a:p>
         </p:txBody>
@@ -16564,7 +16778,10 @@
           <a:bodyPr/>
           <a:lstStyle/>
           <a:p>
-            <a:endParaRPr dirty="0"/>
+            <a:r>
+              <a:rPr dirty="0"/>
+              <a:t>State vs regular variables</a:t>
+            </a:r>
           </a:p>
         </p:txBody>
       </p:sp>
@@ -16588,7 +16805,7 @@
             </a:pPr>
             <a:r>
               <a:rPr dirty="0"/>
-              <a:t>If count were just a normal variable, the UI would not update properly after</a:t>
+              <a:t>A normal JavaScript variable does not trigger a re-render when changed. State</a:t>
             </a:r>
             <a:r>
               <a:rPr lang="en-US" dirty="0"/>
@@ -16596,7 +16813,83 @@
             </a:r>
             <a:r>
               <a:rPr dirty="0"/>
-              <a:t>clicking.</a:t>
+              <a:t>does. That is the main difference.</a:t>
+            </a:r>
+          </a:p>
+          <a:p>
+            <a:pPr>
+              <a:defRPr sz="2200"/>
+            </a:pPr>
+            <a:r>
+              <a:rPr dirty="0"/>
+              <a:t>import { </a:t>
+            </a:r>
+            <a:r>
+              <a:rPr dirty="0" err="1"/>
+              <a:t>useState</a:t>
+            </a:r>
+            <a:r>
+              <a:rPr dirty="0"/>
+              <a:t> } from "react";</a:t>
+            </a:r>
+          </a:p>
+          <a:p>
+            <a:pPr>
+              <a:defRPr sz="2200"/>
+            </a:pPr>
+            <a:r>
+              <a:rPr dirty="0"/>
+              <a:t>function Counter() {</a:t>
+            </a:r>
+          </a:p>
+          <a:p>
+            <a:pPr>
+              <a:defRPr sz="2200"/>
+            </a:pPr>
+            <a:r>
+              <a:rPr dirty="0"/>
+              <a:t>const [count, </a:t>
+            </a:r>
+            <a:r>
+              <a:rPr dirty="0" err="1"/>
+              <a:t>setCount</a:t>
+            </a:r>
+            <a:r>
+              <a:rPr dirty="0"/>
+              <a:t>] = </a:t>
+            </a:r>
+            <a:r>
+              <a:rPr dirty="0" err="1"/>
+              <a:t>useState</a:t>
+            </a:r>
+            <a:r>
+              <a:rPr dirty="0"/>
+              <a:t>(0);</a:t>
+            </a:r>
+          </a:p>
+          <a:p>
+            <a:pPr>
+              <a:defRPr sz="2200"/>
+            </a:pPr>
+            <a:r>
+              <a:rPr dirty="0"/>
+              <a:t>return &lt;button </a:t>
+            </a:r>
+            <a:r>
+              <a:rPr dirty="0" err="1"/>
+              <a:t>onClick</a:t>
+            </a:r>
+            <a:r>
+              <a:rPr dirty="0"/>
+              <a:t>={() =&gt; </a:t>
+            </a:r>
+            <a:r>
+              <a:rPr dirty="0" err="1"/>
+              <a:t>setCount</a:t>
+            </a:r>
+            <a:r>
+              <a:rPr dirty="0"/>
+              <a:t>(count + 1)}&gt;{count}&lt;/button&gt;;</a:t>
             </a:r>
           </a:p>
         </p:txBody>
@@ -16769,9 +17062,7 @@
           <a:bodyPr/>
           <a:lstStyle/>
           <a:p>
-            <a:r>
-              <a:t>useState hook</a:t>
-            </a:r>
+            <a:endParaRPr dirty="0"/>
           </a:p>
         </p:txBody>
       </p:sp>
@@ -16794,47 +17085,16 @@
               <a:defRPr sz="2200"/>
             </a:pPr>
             <a:r>
-              <a:t>In functional components, state is usually handled with useState.</a:t>
-            </a:r>
-          </a:p>
-          <a:p>
-            <a:pPr>
-              <a:defRPr sz="2200"/>
-            </a:pPr>
-            <a:r>
-              <a:t>const [count, setCount] = useState(0);</a:t>
-            </a:r>
-          </a:p>
-          <a:p>
-            <a:pPr>
-              <a:defRPr sz="2200"/>
-            </a:pPr>
-            <a:r>
-              <a:t>count is the current state value.</a:t>
-            </a:r>
-          </a:p>
-          <a:p>
-            <a:pPr>
-              <a:defRPr sz="2200"/>
-            </a:pPr>
-            <a:r>
-              <a:t>setCount is the function used to update it.</a:t>
-            </a:r>
-          </a:p>
-          <a:p>
-            <a:pPr>
-              <a:defRPr sz="2200"/>
-            </a:pPr>
-            <a:r>
-              <a:t>0 is the initial value.</a:t>
-            </a:r>
-          </a:p>
-          <a:p>
-            <a:pPr>
-              <a:defRPr sz="2200"/>
-            </a:pPr>
-            <a:r>
-              <a:t>This is the standard pattern in modern React.</a:t>
+              <a:rPr dirty="0"/>
+              <a:t>If count were just a normal variable, the UI would not update properly after</a:t>
+            </a:r>
+            <a:r>
+              <a:rPr lang="en-US" dirty="0"/>
+              <a:t> </a:t>
+            </a:r>
+            <a:r>
+              <a:rPr dirty="0"/>
+              <a:t>clicking.</a:t>
             </a:r>
           </a:p>
         </p:txBody>
@@ -16880,7 +17140,7 @@
           <a:lstStyle/>
           <a:p>
             <a:r>
-              <a:t>How state updates work</a:t>
+              <a:t>useState hook</a:t>
             </a:r>
           </a:p>
         </p:txBody>
@@ -16904,7 +17164,47 @@
               <a:defRPr sz="2200"/>
             </a:pPr>
             <a:r>
-              <a:t>You should not change state directly. Instead, always use the updater function.</a:t>
+              <a:t>In functional components, state is usually handled with useState.</a:t>
+            </a:r>
+          </a:p>
+          <a:p>
+            <a:pPr>
+              <a:defRPr sz="2200"/>
+            </a:pPr>
+            <a:r>
+              <a:t>const [count, setCount] = useState(0);</a:t>
+            </a:r>
+          </a:p>
+          <a:p>
+            <a:pPr>
+              <a:defRPr sz="2200"/>
+            </a:pPr>
+            <a:r>
+              <a:t>count is the current state value.</a:t>
+            </a:r>
+          </a:p>
+          <a:p>
+            <a:pPr>
+              <a:defRPr sz="2200"/>
+            </a:pPr>
+            <a:r>
+              <a:t>setCount is the function used to update it.</a:t>
+            </a:r>
+          </a:p>
+          <a:p>
+            <a:pPr>
+              <a:defRPr sz="2200"/>
+            </a:pPr>
+            <a:r>
+              <a:t>0 is the initial value.</a:t>
+            </a:r>
+          </a:p>
+          <a:p>
+            <a:pPr>
+              <a:defRPr sz="2200"/>
+            </a:pPr>
+            <a:r>
+              <a:t>This is the standard pattern in modern React.</a:t>
             </a:r>
           </a:p>
         </p:txBody>
@@ -16949,7 +17249,9 @@
           <a:bodyPr/>
           <a:lstStyle/>
           <a:p>
-            <a:endParaRPr dirty="0"/>
+            <a:r>
+              <a:t>How state updates work</a:t>
+            </a:r>
           </a:p>
         </p:txBody>
       </p:sp>
@@ -16972,7 +17274,7 @@
               <a:defRPr sz="2200"/>
             </a:pPr>
             <a:r>
-              <a:t>React uses the update to know that the component should re-render.</a:t>
+              <a:t>You should not change state directly. Instead, always use the updater function.</a:t>
             </a:r>
           </a:p>
         </p:txBody>
@@ -17017,9 +17319,7 @@
           <a:bodyPr/>
           <a:lstStyle/>
           <a:p>
-            <a:r>
-              <a:t>State can store almost any value:</a:t>
-            </a:r>
+            <a:endParaRPr dirty="0"/>
           </a:p>
         </p:txBody>
       </p:sp>
@@ -17042,31 +17342,7 @@
               <a:defRPr sz="2200"/>
             </a:pPr>
             <a:r>
-              <a:t>Numbers.</a:t>
-            </a:r>
-          </a:p>
-          <a:p>
-            <a:pPr>
-              <a:defRPr sz="2200"/>
-            </a:pPr>
-            <a:r>
-              <a:t>Strings.</a:t>
-            </a:r>
-          </a:p>
-          <a:p>
-            <a:pPr>
-              <a:defRPr sz="2200"/>
-            </a:pPr>
-            <a:r>
-              <a:t>Booleans.</a:t>
-            </a:r>
-          </a:p>
-          <a:p>
-            <a:pPr>
-              <a:defRPr sz="2200"/>
-            </a:pPr>
-            <a:r>
-              <a:t>Arrays.</a:t>
+              <a:t>React uses the update to know that the component should re-render.</a:t>
             </a:r>
           </a:p>
         </p:txBody>
@@ -17112,7 +17388,7 @@
           <a:lstStyle/>
           <a:p>
             <a:r>
-              <a:t>Examples:</a:t>
+              <a:t>State can store almost any value:</a:t>
             </a:r>
           </a:p>
         </p:txBody>
@@ -17136,7 +17412,7 @@
               <a:defRPr sz="2200"/>
             </a:pPr>
             <a:r>
-              <a:t>const [name, setName] = useState("");</a:t>
+              <a:t>Numbers.</a:t>
             </a:r>
           </a:p>
           <a:p>
@@ -17144,7 +17420,7 @@
               <a:defRPr sz="2200"/>
             </a:pPr>
             <a:r>
-              <a:t>const [isOpen, setIsOpen] = useState(false);</a:t>
+              <a:t>Strings.</a:t>
             </a:r>
           </a:p>
           <a:p>
@@ -17152,7 +17428,15 @@
               <a:defRPr sz="2200"/>
             </a:pPr>
             <a:r>
-              <a:t>const [items, setItems] = useState([]);</a:t>
+              <a:t>Booleans.</a:t>
+            </a:r>
+          </a:p>
+          <a:p>
+            <a:pPr>
+              <a:defRPr sz="2200"/>
+            </a:pPr>
+            <a:r>
+              <a:t>Arrays.</a:t>
             </a:r>
           </a:p>
         </p:txBody>
@@ -17198,7 +17482,7 @@
           <a:lstStyle/>
           <a:p>
             <a:r>
-              <a:t>State is used in many interactive UI features:</a:t>
+              <a:t>Examples:</a:t>
             </a:r>
           </a:p>
         </p:txBody>
@@ -17215,17 +17499,14 @@
         </p:nvSpPr>
         <p:spPr/>
         <p:txBody>
-          <a:bodyPr>
-            <a:normAutofit lnSpcReduction="10000"/>
-          </a:bodyPr>
+          <a:bodyPr/>
           <a:lstStyle/>
           <a:p>
             <a:pPr>
               <a:defRPr sz="2200"/>
             </a:pPr>
             <a:r>
-              <a:rPr dirty="0"/>
-              <a:t>Counters.</a:t>
+              <a:t>const [name, setName] = useState("");</a:t>
             </a:r>
           </a:p>
           <a:p>
@@ -17233,8 +17514,7 @@
               <a:defRPr sz="2200"/>
             </a:pPr>
             <a:r>
-              <a:rPr dirty="0"/>
-              <a:t>Form inputs.</a:t>
+              <a:t>const [isOpen, setIsOpen] = useState(false);</a:t>
             </a:r>
           </a:p>
           <a:p>
@@ -17242,45 +17522,7 @@
               <a:defRPr sz="2200"/>
             </a:pPr>
             <a:r>
-              <a:rPr dirty="0"/>
-              <a:t>Toggle switches.</a:t>
-            </a:r>
-          </a:p>
-          <a:p>
-            <a:pPr>
-              <a:defRPr sz="2200"/>
-            </a:pPr>
-            <a:r>
-              <a:rPr dirty="0"/>
-              <a:t>Tabs and dropdowns.</a:t>
-            </a:r>
-          </a:p>
-          <a:p>
-            <a:pPr>
-              <a:defRPr sz="2200"/>
-            </a:pPr>
-            <a:r>
-              <a:rPr dirty="0"/>
-              <a:t>Modals.</a:t>
-            </a:r>
-          </a:p>
-          <a:p>
-            <a:pPr>
-              <a:defRPr sz="2200"/>
-            </a:pPr>
-            <a:r>
-              <a:rPr dirty="0"/>
-              <a:t>Shopping carts.</a:t>
-            </a:r>
-            <a:endParaRPr lang="en-US" dirty="0"/>
-          </a:p>
-          <a:p>
-            <a:pPr>
-              <a:defRPr sz="2200"/>
-            </a:pPr>
-            <a:r>
-              <a:rPr lang="en-IN" dirty="0"/>
-              <a:t>API data loading.</a:t>
+              <a:t>const [items, setItems] = useState([]);</a:t>
             </a:r>
           </a:p>
         </p:txBody>
@@ -17326,7 +17568,7 @@
           <a:lstStyle/>
           <a:p>
             <a:r>
-              <a:t>When state changes:</a:t>
+              <a:t>State is used in many interactive UI features:</a:t>
             </a:r>
           </a:p>
         </p:txBody>
@@ -17343,14 +17585,17 @@
         </p:nvSpPr>
         <p:spPr/>
         <p:txBody>
-          <a:bodyPr/>
+          <a:bodyPr>
+            <a:normAutofit lnSpcReduction="10000"/>
+          </a:bodyPr>
           <a:lstStyle/>
           <a:p>
             <a:pPr>
               <a:defRPr sz="2200"/>
             </a:pPr>
             <a:r>
-              <a:t>React updates the stored value.</a:t>
+              <a:rPr dirty="0"/>
+              <a:t>Counters.</a:t>
             </a:r>
           </a:p>
           <a:p>
@@ -17358,7 +17603,8 @@
               <a:defRPr sz="2200"/>
             </a:pPr>
             <a:r>
-              <a:t>React re-renders the component.</a:t>
+              <a:rPr dirty="0"/>
+              <a:t>Form inputs.</a:t>
             </a:r>
           </a:p>
           <a:p>
@@ -17366,7 +17612,8 @@
               <a:defRPr sz="2200"/>
             </a:pPr>
             <a:r>
-              <a:t>The UI shows the new data.</a:t>
+              <a:rPr dirty="0"/>
+              <a:t>Toggle switches.</a:t>
             </a:r>
           </a:p>
           <a:p>
@@ -17374,7 +17621,36 @@
               <a:defRPr sz="2200"/>
             </a:pPr>
             <a:r>
-              <a:t>This is one of the core ideas behind React’s dynamic behavior.</a:t>
+              <a:rPr dirty="0"/>
+              <a:t>Tabs and dropdowns.</a:t>
+            </a:r>
+          </a:p>
+          <a:p>
+            <a:pPr>
+              <a:defRPr sz="2200"/>
+            </a:pPr>
+            <a:r>
+              <a:rPr dirty="0"/>
+              <a:t>Modals.</a:t>
+            </a:r>
+          </a:p>
+          <a:p>
+            <a:pPr>
+              <a:defRPr sz="2200"/>
+            </a:pPr>
+            <a:r>
+              <a:rPr dirty="0"/>
+              <a:t>Shopping carts.</a:t>
+            </a:r>
+            <a:endParaRPr lang="en-US" dirty="0"/>
+          </a:p>
+          <a:p>
+            <a:pPr>
+              <a:defRPr sz="2200"/>
+            </a:pPr>
+            <a:r>
+              <a:rPr lang="en-IN" dirty="0"/>
+              <a:t>API data loading.</a:t>
             </a:r>
           </a:p>
         </p:txBody>
@@ -17420,7 +17696,7 @@
           <a:lstStyle/>
           <a:p>
             <a:r>
-              <a:t>State is local</a:t>
+              <a:t>When state changes:</a:t>
             </a:r>
           </a:p>
         </p:txBody>
@@ -17444,16 +17720,31 @@
               <a:defRPr sz="2200"/>
             </a:pPr>
             <a:r>
-              <a:rPr dirty="0"/>
-              <a:t>State belongs to a specific component. If you render the same component multiple</a:t>
-            </a:r>
-            <a:r>
-              <a:rPr lang="en-US" dirty="0"/>
-              <a:t> </a:t>
-            </a:r>
-            <a:r>
-              <a:rPr dirty="0"/>
-              <a:t>times, each instance can have its own separate state.</a:t>
+              <a:t>React updates the stored value.</a:t>
+            </a:r>
+          </a:p>
+          <a:p>
+            <a:pPr>
+              <a:defRPr sz="2200"/>
+            </a:pPr>
+            <a:r>
+              <a:t>React re-renders the component.</a:t>
+            </a:r>
+          </a:p>
+          <a:p>
+            <a:pPr>
+              <a:defRPr sz="2200"/>
+            </a:pPr>
+            <a:r>
+              <a:t>The UI shows the new data.</a:t>
+            </a:r>
+          </a:p>
+          <a:p>
+            <a:pPr>
+              <a:defRPr sz="2200"/>
+            </a:pPr>
+            <a:r>
+              <a:t>This is one of the core ideas behind React’s dynamic behavior.</a:t>
             </a:r>
           </a:p>
         </p:txBody>
@@ -17499,7 +17790,7 @@
           <a:lstStyle/>
           <a:p>
             <a:r>
-              <a:t>State vs props</a:t>
+              <a:t>State is local</a:t>
             </a:r>
           </a:p>
         </p:txBody>
@@ -17523,15 +17814,16 @@
               <a:defRPr sz="2200"/>
             </a:pPr>
             <a:r>
-              <a:t>Props come from the parent and are read-only.</a:t>
-            </a:r>
-          </a:p>
-          <a:p>
-            <a:pPr>
-              <a:defRPr sz="2200"/>
-            </a:pPr>
-            <a:r>
-              <a:t>State belongs to the component and can change.</a:t>
+              <a:rPr dirty="0"/>
+              <a:t>State belongs to a specific component. If you render the same component multiple</a:t>
+            </a:r>
+            <a:r>
+              <a:rPr lang="en-US" dirty="0"/>
+              <a:t> </a:t>
+            </a:r>
+            <a:r>
+              <a:rPr dirty="0"/>
+              <a:t>times, each instance can have its own separate state.</a:t>
             </a:r>
           </a:p>
         </p:txBody>
@@ -17577,7 +17869,7 @@
           <a:lstStyle/>
           <a:p>
             <a:r>
-              <a:t>Simple memory trick:</a:t>
+              <a:t>State vs props</a:t>
             </a:r>
           </a:p>
         </p:txBody>
@@ -17601,7 +17893,8 @@
               <a:defRPr sz="2200"/>
             </a:pPr>
             <a:r>
-              <a:t>Props = passed in.</a:t>
+              <a:rPr dirty="0"/>
+              <a:t>Props come from the parent and are read-only.</a:t>
             </a:r>
           </a:p>
           <a:p>
@@ -17609,7 +17902,8 @@
               <a:defRPr sz="2200"/>
             </a:pPr>
             <a:r>
-              <a:t>State = managed inside.</a:t>
+              <a:rPr dirty="0"/>
+              <a:t>State belongs to the component and can change.</a:t>
             </a:r>
           </a:p>
         </p:txBody>
